--- a/05_Team_Presentation(Viva)/05_Contribution/TEAM PRESENTION.pptx
+++ b/05_Team_Presentation(Viva)/05_Contribution/TEAM PRESENTION.pptx
@@ -9,15 +9,25 @@
     <p:sldId id="257" r:id="rId3"/>
     <p:sldId id="258" r:id="rId4"/>
     <p:sldId id="259" r:id="rId5"/>
-    <p:sldId id="260" r:id="rId6"/>
-    <p:sldId id="261" r:id="rId7"/>
-    <p:sldId id="262" r:id="rId8"/>
-    <p:sldId id="263" r:id="rId9"/>
-    <p:sldId id="264" r:id="rId10"/>
-    <p:sldId id="265" r:id="rId11"/>
+    <p:sldId id="266" r:id="rId6"/>
+    <p:sldId id="260" r:id="rId7"/>
+    <p:sldId id="268" r:id="rId8"/>
+    <p:sldId id="269" r:id="rId9"/>
+    <p:sldId id="270" r:id="rId10"/>
+    <p:sldId id="261" r:id="rId11"/>
+    <p:sldId id="267" r:id="rId12"/>
+    <p:sldId id="271" r:id="rId13"/>
+    <p:sldId id="262" r:id="rId14"/>
+    <p:sldId id="272" r:id="rId15"/>
+    <p:sldId id="263" r:id="rId16"/>
+    <p:sldId id="264" r:id="rId17"/>
+    <p:sldId id="265" r:id="rId18"/>
   </p:sldIdLst>
   <p:sldSz cx="12192000" cy="6858000"/>
   <p:notesSz cx="6858000" cy="9144000"/>
+  <p:custDataLst>
+    <p:tags r:id="rId19"/>
+  </p:custDataLst>
   <p:defaultTextStyle>
     <a:defPPr>
       <a:defRPr lang="en-US"/>
@@ -119,6 +129,14 @@
     </p:ext>
   </p:extLst>
 </p:presentation>
+</file>
+
+<file path=ppt/revisionInfo.xml><?xml version="1.0" encoding="utf-8"?>
+<p1510:revInfo xmlns:a="http://schemas.openxmlformats.org/drawingml/2006/main" xmlns:r="http://schemas.openxmlformats.org/officeDocument/2006/relationships" xmlns:p1510="http://schemas.microsoft.com/office/powerpoint/2015/10/main">
+  <p1510:revLst>
+    <p1510:client id="{B7ACEB7B-5AF9-4D39-89BA-D0E904B890EF}" v="4" dt="2026-10-21T08:27:24.425"/>
+  </p1510:revLst>
+</p1510:revInfo>
 </file>
 
 <file path=ppt/diagrams/colors1.xml><?xml version="1.0" encoding="utf-8"?>
@@ -8129,10 +8147,9 @@
             <a:defRPr cap="all"/>
           </a:pPr>
           <a:r>
-            <a:rPr lang="en-GB"/>
-            <a:t>CYBERSECURITY AWARENESS .</a:t>
+            <a:rPr lang="en-US" dirty="0"/>
+            <a:t>MINIPROJECT 2 </a:t>
           </a:r>
-          <a:endParaRPr lang="en-US"/>
         </a:p>
       </dgm:t>
     </dgm:pt>
@@ -13040,7 +13057,7 @@
         </a:bodyPr>
         <a:lstStyle/>
         <a:p>
-          <a:pPr marL="0" lvl="0" indent="0" algn="ctr" defTabSz="1022350">
+          <a:pPr marL="0" lvl="0" indent="0" algn="ctr" defTabSz="1333500">
             <a:lnSpc>
               <a:spcPct val="100000"/>
             </a:lnSpc>
@@ -13054,10 +13071,10 @@
             <a:defRPr cap="all"/>
           </a:pPr>
           <a:r>
-            <a:rPr lang="en-GB" sz="2300" kern="1200"/>
+            <a:rPr lang="en-GB" sz="3000" kern="1200"/>
             <a:t>MINI PROJECT FOUR </a:t>
           </a:r>
-          <a:endParaRPr lang="en-US" sz="2300" kern="1200"/>
+          <a:endParaRPr lang="en-US" sz="3000" kern="1200"/>
         </a:p>
       </dsp:txBody>
       <dsp:txXfrm>
@@ -13199,7 +13216,7 @@
         </a:bodyPr>
         <a:lstStyle/>
         <a:p>
-          <a:pPr marL="0" lvl="0" indent="0" algn="ctr" defTabSz="1022350">
+          <a:pPr marL="0" lvl="0" indent="0" algn="ctr" defTabSz="1333500">
             <a:lnSpc>
               <a:spcPct val="100000"/>
             </a:lnSpc>
@@ -13213,10 +13230,9 @@
             <a:defRPr cap="all"/>
           </a:pPr>
           <a:r>
-            <a:rPr lang="en-GB" sz="2300" kern="1200"/>
-            <a:t>CYBERSECURITY AWARENESS .</a:t>
+            <a:rPr lang="en-US" sz="3000" kern="1200" dirty="0"/>
+            <a:t>MINIPROJECT 2 </a:t>
           </a:r>
-          <a:endParaRPr lang="en-US" sz="2300" kern="1200"/>
         </a:p>
       </dsp:txBody>
       <dsp:txXfrm>
@@ -22004,7 +22020,7 @@
           <a:p>
             <a:fld id="{6444479B-705B-4489-957E-7E8A228BDFA0}" type="datetime1">
               <a:rPr lang="en-US" smtClean="0"/>
-              <a:t>10/16/2026</a:t>
+              <a:t>10/21/2026</a:t>
             </a:fld>
             <a:endParaRPr lang="en-US"/>
           </a:p>
@@ -22204,7 +22220,7 @@
           <a:p>
             <a:fld id="{C07B66AD-7C08-490A-ADA4-B47E10FB2407}" type="datetime1">
               <a:rPr lang="en-US" smtClean="0"/>
-              <a:t>10/16/2026</a:t>
+              <a:t>10/21/2026</a:t>
             </a:fld>
             <a:endParaRPr lang="en-US"/>
           </a:p>
@@ -22463,7 +22479,7 @@
           <a:p>
             <a:fld id="{05B95027-4255-49E7-9841-CD21BCC99996}" type="datetime1">
               <a:rPr lang="en-US" smtClean="0"/>
-              <a:t>10/16/2026</a:t>
+              <a:t>10/21/2026</a:t>
             </a:fld>
             <a:endParaRPr lang="en-US"/>
           </a:p>
@@ -22704,7 +22720,7 @@
           <a:p>
             <a:fld id="{9F89F774-3FA6-43B8-9241-99959C8FD463}" type="datetime1">
               <a:rPr lang="en-US" smtClean="0"/>
-              <a:t>10/16/2026</a:t>
+              <a:t>10/21/2026</a:t>
             </a:fld>
             <a:endParaRPr lang="en-US"/>
           </a:p>
@@ -23031,7 +23047,7 @@
           <a:p>
             <a:fld id="{F9504452-5DCC-4FE2-A5C9-8A5EF6714D65}" type="datetime1">
               <a:rPr lang="en-US" smtClean="0"/>
-              <a:t>10/16/2026</a:t>
+              <a:t>10/21/2026</a:t>
             </a:fld>
             <a:endParaRPr lang="en-US"/>
           </a:p>
@@ -23341,7 +23357,7 @@
           <a:p>
             <a:fld id="{E579ABC2-0180-4F3A-A895-A85BC724D472}" type="datetime1">
               <a:rPr lang="en-US" smtClean="0"/>
-              <a:t>10/16/2026</a:t>
+              <a:t>10/21/2026</a:t>
             </a:fld>
             <a:endParaRPr lang="en-US"/>
           </a:p>
@@ -23759,7 +23775,7 @@
           <a:p>
             <a:fld id="{6AEEA9BA-4E8F-439E-BEA4-91FBA01E3F5F}" type="datetime1">
               <a:rPr lang="en-US" smtClean="0"/>
-              <a:t>10/16/2026</a:t>
+              <a:t>10/21/2026</a:t>
             </a:fld>
             <a:endParaRPr lang="en-US"/>
           </a:p>
@@ -23901,7 +23917,7 @@
           <a:p>
             <a:fld id="{BE15BF18-0007-481C-AA29-413124BC3EE7}" type="datetime1">
               <a:rPr lang="en-US" smtClean="0"/>
-              <a:t>10/16/2026</a:t>
+              <a:t>10/21/2026</a:t>
             </a:fld>
             <a:endParaRPr lang="en-US"/>
           </a:p>
@@ -24063,7 +24079,7 @@
           <a:p>
             <a:fld id="{09BE9870-3748-43AD-B547-02A075CB4A1D}" type="datetime1">
               <a:rPr lang="en-US" smtClean="0"/>
-              <a:t>10/16/2026</a:t>
+              <a:t>10/21/2026</a:t>
             </a:fld>
             <a:endParaRPr lang="en-US"/>
           </a:p>
@@ -24380,7 +24396,7 @@
           <a:p>
             <a:fld id="{558E7897-33C5-4F1A-9307-D068E37F3DC7}" type="datetime1">
               <a:rPr lang="en-US" smtClean="0"/>
-              <a:t>10/16/2026</a:t>
+              <a:t>10/21/2026</a:t>
             </a:fld>
             <a:endParaRPr lang="en-US"/>
           </a:p>
@@ -24675,7 +24691,7 @@
           <a:p>
             <a:fld id="{82E171BA-CC09-47C8-A6DF-F5C5CB59CEEC}" type="datetime1">
               <a:rPr lang="en-US" smtClean="0"/>
-              <a:t>10/16/2026</a:t>
+              <a:t>10/21/2026</a:t>
             </a:fld>
             <a:endParaRPr lang="en-US"/>
           </a:p>
@@ -24916,7 +24932,7 @@
           <a:p>
             <a:fld id="{7DA38F49-B3E2-4BF0-BEC7-C30D34ABBB8D}" type="datetime1">
               <a:rPr lang="en-US" smtClean="0"/>
-              <a:t>10/16/2026</a:t>
+              <a:t>10/21/2026</a:t>
             </a:fld>
             <a:endParaRPr lang="en-US"/>
           </a:p>
@@ -25849,6 +25865,1159 @@
 <file path=ppt/slides/slide10.xml><?xml version="1.0" encoding="utf-8"?>
 <p:sld xmlns:a="http://schemas.openxmlformats.org/drawingml/2006/main" xmlns:r="http://schemas.openxmlformats.org/officeDocument/2006/relationships" xmlns:p="http://schemas.openxmlformats.org/presentationml/2006/main">
   <p:cSld>
+    <p:spTree>
+      <p:nvGrpSpPr>
+        <p:cNvPr id="1" name=""/>
+        <p:cNvGrpSpPr/>
+        <p:nvPr/>
+      </p:nvGrpSpPr>
+      <p:grpSpPr>
+        <a:xfrm>
+          <a:off x="0" y="0"/>
+          <a:ext cx="0" cy="0"/>
+          <a:chOff x="0" y="0"/>
+          <a:chExt cx="0" cy="0"/>
+        </a:xfrm>
+      </p:grpSpPr>
+      <p:sp>
+        <p:nvSpPr>
+          <p:cNvPr id="2" name="Title 1">
+            <a:extLst>
+              <a:ext uri="{FF2B5EF4-FFF2-40B4-BE49-F238E27FC236}">
+                <a16:creationId xmlns:a16="http://schemas.microsoft.com/office/drawing/2014/main" id="{63A3D83C-BEA6-9BB9-A3F4-BD9D97CC49A9}"/>
+              </a:ext>
+            </a:extLst>
+          </p:cNvPr>
+          <p:cNvSpPr>
+            <a:spLocks noGrp="1"/>
+          </p:cNvSpPr>
+          <p:nvPr>
+            <p:ph type="title"/>
+          </p:nvPr>
+        </p:nvSpPr>
+        <p:spPr/>
+        <p:txBody>
+          <a:bodyPr/>
+          <a:lstStyle/>
+          <a:p>
+            <a:r>
+              <a:rPr lang="en-GB" dirty="0"/>
+              <a:t>MINI PROJECT 3 </a:t>
+            </a:r>
+          </a:p>
+        </p:txBody>
+      </p:sp>
+      <p:graphicFrame>
+        <p:nvGraphicFramePr>
+          <p:cNvPr id="20" name="Content Placeholder 2">
+            <a:extLst>
+              <a:ext uri="{FF2B5EF4-FFF2-40B4-BE49-F238E27FC236}">
+                <a16:creationId xmlns:a16="http://schemas.microsoft.com/office/drawing/2014/main" id="{71ED9C43-7BAC-31B2-0E81-309AC9959BDD}"/>
+              </a:ext>
+            </a:extLst>
+          </p:cNvPr>
+          <p:cNvGraphicFramePr>
+            <a:graphicFrameLocks noGrp="1"/>
+          </p:cNvGraphicFramePr>
+          <p:nvPr>
+            <p:ph idx="1"/>
+            <p:extLst>
+              <p:ext uri="{D42A27DB-BD31-4B8C-83A1-F6EECF244321}">
+                <p14:modId xmlns:p14="http://schemas.microsoft.com/office/powerpoint/2010/main" val="2756422814"/>
+              </p:ext>
+            </p:extLst>
+          </p:nvPr>
+        </p:nvGraphicFramePr>
+        <p:xfrm>
+          <a:off x="4936518" y="457200"/>
+          <a:ext cx="7255481" cy="6400799"/>
+        </p:xfrm>
+        <a:graphic>
+          <a:graphicData uri="http://schemas.openxmlformats.org/drawingml/2006/diagram">
+            <dgm:relIds xmlns:dgm="http://schemas.openxmlformats.org/drawingml/2006/diagram" xmlns:r="http://schemas.openxmlformats.org/officeDocument/2006/relationships" r:dm="rId2" r:lo="rId3" r:qs="rId4" r:cs="rId5"/>
+          </a:graphicData>
+        </a:graphic>
+      </p:graphicFrame>
+      <p:sp>
+        <p:nvSpPr>
+          <p:cNvPr id="4" name="Text Placeholder 3">
+            <a:extLst>
+              <a:ext uri="{FF2B5EF4-FFF2-40B4-BE49-F238E27FC236}">
+                <a16:creationId xmlns:a16="http://schemas.microsoft.com/office/drawing/2014/main" id="{6B8670FE-C091-2A4A-37C8-99C1D19B2849}"/>
+              </a:ext>
+            </a:extLst>
+          </p:cNvPr>
+          <p:cNvSpPr>
+            <a:spLocks noGrp="1"/>
+          </p:cNvSpPr>
+          <p:nvPr>
+            <p:ph type="body" sz="half" idx="2"/>
+          </p:nvPr>
+        </p:nvSpPr>
+        <p:spPr/>
+        <p:txBody>
+          <a:bodyPr>
+            <a:normAutofit/>
+          </a:bodyPr>
+          <a:lstStyle/>
+          <a:p>
+            <a:r>
+              <a:rPr lang="en-GB" sz="2800" dirty="0"/>
+              <a:t>WHAT WAS GIVEN :</a:t>
+            </a:r>
+          </a:p>
+          <a:p>
+            <a:r>
+              <a:rPr lang="en-GB" sz="2400" dirty="0"/>
+              <a:t>Build an office network in Filius.</a:t>
+            </a:r>
+          </a:p>
+          <a:p>
+            <a:r>
+              <a:rPr lang="en-GB" sz="2400" dirty="0"/>
+              <a:t>Connect office PCs, servers, and cloud network.</a:t>
+            </a:r>
+          </a:p>
+          <a:p>
+            <a:endParaRPr lang="en-GB" sz="2800" dirty="0"/>
+          </a:p>
+        </p:txBody>
+      </p:sp>
+    </p:spTree>
+    <p:extLst>
+      <p:ext uri="{BB962C8B-B14F-4D97-AF65-F5344CB8AC3E}">
+        <p14:creationId xmlns:p14="http://schemas.microsoft.com/office/powerpoint/2010/main" val="3993447997"/>
+      </p:ext>
+    </p:extLst>
+  </p:cSld>
+  <p:clrMapOvr>
+    <a:masterClrMapping/>
+  </p:clrMapOvr>
+</p:sld>
+</file>
+
+<file path=ppt/slides/slide11.xml><?xml version="1.0" encoding="utf-8"?>
+<p:sld xmlns:a="http://schemas.openxmlformats.org/drawingml/2006/main" xmlns:r="http://schemas.openxmlformats.org/officeDocument/2006/relationships" xmlns:p="http://schemas.openxmlformats.org/presentationml/2006/main">
+  <p:cSld>
+    <p:spTree>
+      <p:nvGrpSpPr>
+        <p:cNvPr id="1" name=""/>
+        <p:cNvGrpSpPr/>
+        <p:nvPr/>
+      </p:nvGrpSpPr>
+      <p:grpSpPr>
+        <a:xfrm>
+          <a:off x="0" y="0"/>
+          <a:ext cx="0" cy="0"/>
+          <a:chOff x="0" y="0"/>
+          <a:chExt cx="0" cy="0"/>
+        </a:xfrm>
+      </p:grpSpPr>
+      <p:sp>
+        <p:nvSpPr>
+          <p:cNvPr id="2" name="Title 1">
+            <a:extLst>
+              <a:ext uri="{FF2B5EF4-FFF2-40B4-BE49-F238E27FC236}">
+                <a16:creationId xmlns:a16="http://schemas.microsoft.com/office/drawing/2014/main" id="{57634B8D-BD67-EDD5-0481-214C03087569}"/>
+              </a:ext>
+            </a:extLst>
+          </p:cNvPr>
+          <p:cNvSpPr>
+            <a:spLocks noGrp="1"/>
+          </p:cNvSpPr>
+          <p:nvPr>
+            <p:ph type="title"/>
+          </p:nvPr>
+        </p:nvSpPr>
+        <p:spPr/>
+        <p:txBody>
+          <a:bodyPr/>
+          <a:lstStyle/>
+          <a:p>
+            <a:r>
+              <a:rPr lang="en-GB" dirty="0"/>
+              <a:t>MINI PROJECT 3</a:t>
+            </a:r>
+          </a:p>
+        </p:txBody>
+      </p:sp>
+      <p:pic>
+        <p:nvPicPr>
+          <p:cNvPr id="6" name="Content Placeholder 5">
+            <a:extLst>
+              <a:ext uri="{FF2B5EF4-FFF2-40B4-BE49-F238E27FC236}">
+                <a16:creationId xmlns:a16="http://schemas.microsoft.com/office/drawing/2014/main" id="{0CBF05AE-582E-7337-FE94-BB8930B02DF5}"/>
+              </a:ext>
+            </a:extLst>
+          </p:cNvPr>
+          <p:cNvPicPr>
+            <a:picLocks noGrp="1" noChangeAspect="1"/>
+          </p:cNvPicPr>
+          <p:nvPr>
+            <p:ph idx="1"/>
+          </p:nvPr>
+        </p:nvPicPr>
+        <p:blipFill>
+          <a:blip r:embed="rId2">
+            <a:extLst>
+              <a:ext uri="{28A0092B-C50C-407E-A947-70E740481C1C}">
+                <a14:useLocalDpi xmlns:a14="http://schemas.microsoft.com/office/drawing/2010/main" val="0"/>
+              </a:ext>
+            </a:extLst>
+          </a:blip>
+          <a:stretch>
+            <a:fillRect/>
+          </a:stretch>
+        </p:blipFill>
+        <p:spPr>
+          <a:xfrm>
+            <a:off x="6248401" y="400050"/>
+            <a:ext cx="4216400" cy="2717800"/>
+          </a:xfrm>
+          <a:prstGeom prst="rect">
+            <a:avLst/>
+          </a:prstGeom>
+        </p:spPr>
+      </p:pic>
+      <p:sp>
+        <p:nvSpPr>
+          <p:cNvPr id="4" name="Text Placeholder 3">
+            <a:extLst>
+              <a:ext uri="{FF2B5EF4-FFF2-40B4-BE49-F238E27FC236}">
+                <a16:creationId xmlns:a16="http://schemas.microsoft.com/office/drawing/2014/main" id="{AE02A726-3C7E-BD66-0A9A-2E7EFEF80A2D}"/>
+              </a:ext>
+            </a:extLst>
+          </p:cNvPr>
+          <p:cNvSpPr>
+            <a:spLocks noGrp="1"/>
+          </p:cNvSpPr>
+          <p:nvPr>
+            <p:ph type="body" sz="half" idx="2"/>
+          </p:nvPr>
+        </p:nvSpPr>
+        <p:spPr/>
+        <p:txBody>
+          <a:bodyPr/>
+          <a:lstStyle/>
+          <a:p>
+            <a:r>
+              <a:rPr lang="en-GB" dirty="0"/>
+              <a:t>EVIDENCE </a:t>
+            </a:r>
+          </a:p>
+        </p:txBody>
+      </p:sp>
+      <p:pic>
+        <p:nvPicPr>
+          <p:cNvPr id="8" name="Picture 7">
+            <a:extLst>
+              <a:ext uri="{FF2B5EF4-FFF2-40B4-BE49-F238E27FC236}">
+                <a16:creationId xmlns:a16="http://schemas.microsoft.com/office/drawing/2014/main" id="{1A7F17F2-8D28-A541-DBE3-BB324A6D3BA1}"/>
+              </a:ext>
+            </a:extLst>
+          </p:cNvPr>
+          <p:cNvPicPr>
+            <a:picLocks noChangeAspect="1"/>
+          </p:cNvPicPr>
+          <p:nvPr/>
+        </p:nvPicPr>
+        <p:blipFill>
+          <a:blip r:embed="rId3">
+            <a:extLst>
+              <a:ext uri="{28A0092B-C50C-407E-A947-70E740481C1C}">
+                <a14:useLocalDpi xmlns:a14="http://schemas.microsoft.com/office/drawing/2010/main" val="0"/>
+              </a:ext>
+            </a:extLst>
+          </a:blip>
+          <a:stretch>
+            <a:fillRect/>
+          </a:stretch>
+        </p:blipFill>
+        <p:spPr>
+          <a:xfrm>
+            <a:off x="6248400" y="3162300"/>
+            <a:ext cx="4216400" cy="3429000"/>
+          </a:xfrm>
+          <a:prstGeom prst="rect">
+            <a:avLst/>
+          </a:prstGeom>
+        </p:spPr>
+      </p:pic>
+    </p:spTree>
+    <p:extLst>
+      <p:ext uri="{BB962C8B-B14F-4D97-AF65-F5344CB8AC3E}">
+        <p14:creationId xmlns:p14="http://schemas.microsoft.com/office/powerpoint/2010/main" val="570675272"/>
+      </p:ext>
+    </p:extLst>
+  </p:cSld>
+  <p:clrMapOvr>
+    <a:masterClrMapping/>
+  </p:clrMapOvr>
+</p:sld>
+</file>
+
+<file path=ppt/slides/slide12.xml><?xml version="1.0" encoding="utf-8"?>
+<p:sld xmlns:a="http://schemas.openxmlformats.org/drawingml/2006/main" xmlns:r="http://schemas.openxmlformats.org/officeDocument/2006/relationships" xmlns:p="http://schemas.openxmlformats.org/presentationml/2006/main">
+  <p:cSld>
+    <p:spTree>
+      <p:nvGrpSpPr>
+        <p:cNvPr id="1" name=""/>
+        <p:cNvGrpSpPr/>
+        <p:nvPr/>
+      </p:nvGrpSpPr>
+      <p:grpSpPr>
+        <a:xfrm>
+          <a:off x="0" y="0"/>
+          <a:ext cx="0" cy="0"/>
+          <a:chOff x="0" y="0"/>
+          <a:chExt cx="0" cy="0"/>
+        </a:xfrm>
+      </p:grpSpPr>
+      <p:sp>
+        <p:nvSpPr>
+          <p:cNvPr id="2" name="Title 1">
+            <a:extLst>
+              <a:ext uri="{FF2B5EF4-FFF2-40B4-BE49-F238E27FC236}">
+                <a16:creationId xmlns:a16="http://schemas.microsoft.com/office/drawing/2014/main" id="{193BB18F-59B1-6556-90FC-F1510A933F46}"/>
+              </a:ext>
+            </a:extLst>
+          </p:cNvPr>
+          <p:cNvSpPr>
+            <a:spLocks noGrp="1"/>
+          </p:cNvSpPr>
+          <p:nvPr>
+            <p:ph type="title"/>
+          </p:nvPr>
+        </p:nvSpPr>
+        <p:spPr/>
+        <p:txBody>
+          <a:bodyPr/>
+          <a:lstStyle/>
+          <a:p>
+            <a:r>
+              <a:rPr lang="en-GB" dirty="0"/>
+              <a:t>MINI PROJECT 3 </a:t>
+            </a:r>
+          </a:p>
+        </p:txBody>
+      </p:sp>
+      <p:pic>
+        <p:nvPicPr>
+          <p:cNvPr id="6" name="Content Placeholder 5">
+            <a:extLst>
+              <a:ext uri="{FF2B5EF4-FFF2-40B4-BE49-F238E27FC236}">
+                <a16:creationId xmlns:a16="http://schemas.microsoft.com/office/drawing/2014/main" id="{8804A351-101C-6C7C-23DF-DAD3F52E4587}"/>
+              </a:ext>
+            </a:extLst>
+          </p:cNvPr>
+          <p:cNvPicPr>
+            <a:picLocks noGrp="1" noChangeAspect="1"/>
+          </p:cNvPicPr>
+          <p:nvPr>
+            <p:ph idx="1"/>
+          </p:nvPr>
+        </p:nvPicPr>
+        <p:blipFill>
+          <a:blip r:embed="rId2">
+            <a:extLst>
+              <a:ext uri="{28A0092B-C50C-407E-A947-70E740481C1C}">
+                <a14:useLocalDpi xmlns:a14="http://schemas.microsoft.com/office/drawing/2010/main" val="0"/>
+              </a:ext>
+            </a:extLst>
+          </a:blip>
+          <a:stretch>
+            <a:fillRect/>
+          </a:stretch>
+        </p:blipFill>
+        <p:spPr>
+          <a:xfrm>
+            <a:off x="6095948" y="1030288"/>
+            <a:ext cx="4276829" cy="5167312"/>
+          </a:xfrm>
+          <a:prstGeom prst="rect">
+            <a:avLst/>
+          </a:prstGeom>
+        </p:spPr>
+      </p:pic>
+      <p:sp>
+        <p:nvSpPr>
+          <p:cNvPr id="4" name="Text Placeholder 3">
+            <a:extLst>
+              <a:ext uri="{FF2B5EF4-FFF2-40B4-BE49-F238E27FC236}">
+                <a16:creationId xmlns:a16="http://schemas.microsoft.com/office/drawing/2014/main" id="{86DB7B03-0FC3-5E67-A223-325255C122C5}"/>
+              </a:ext>
+            </a:extLst>
+          </p:cNvPr>
+          <p:cNvSpPr>
+            <a:spLocks noGrp="1"/>
+          </p:cNvSpPr>
+          <p:nvPr>
+            <p:ph type="body" sz="half" idx="2"/>
+          </p:nvPr>
+        </p:nvSpPr>
+        <p:spPr/>
+        <p:txBody>
+          <a:bodyPr/>
+          <a:lstStyle/>
+          <a:p>
+            <a:r>
+              <a:rPr lang="en-GB" dirty="0"/>
+              <a:t>EVIDENCE </a:t>
+            </a:r>
+          </a:p>
+        </p:txBody>
+      </p:sp>
+    </p:spTree>
+    <p:extLst>
+      <p:ext uri="{BB962C8B-B14F-4D97-AF65-F5344CB8AC3E}">
+        <p14:creationId xmlns:p14="http://schemas.microsoft.com/office/powerpoint/2010/main" val="2396907301"/>
+      </p:ext>
+    </p:extLst>
+  </p:cSld>
+  <p:clrMapOvr>
+    <a:masterClrMapping/>
+  </p:clrMapOvr>
+</p:sld>
+</file>
+
+<file path=ppt/slides/slide13.xml><?xml version="1.0" encoding="utf-8"?>
+<p:sld xmlns:a="http://schemas.openxmlformats.org/drawingml/2006/main" xmlns:r="http://schemas.openxmlformats.org/officeDocument/2006/relationships" xmlns:p="http://schemas.openxmlformats.org/presentationml/2006/main">
+  <p:cSld>
+    <p:spTree>
+      <p:nvGrpSpPr>
+        <p:cNvPr id="1" name=""/>
+        <p:cNvGrpSpPr/>
+        <p:nvPr/>
+      </p:nvGrpSpPr>
+      <p:grpSpPr>
+        <a:xfrm>
+          <a:off x="0" y="0"/>
+          <a:ext cx="0" cy="0"/>
+          <a:chOff x="0" y="0"/>
+          <a:chExt cx="0" cy="0"/>
+        </a:xfrm>
+      </p:grpSpPr>
+      <p:sp>
+        <p:nvSpPr>
+          <p:cNvPr id="2" name="Title 1">
+            <a:extLst>
+              <a:ext uri="{FF2B5EF4-FFF2-40B4-BE49-F238E27FC236}">
+                <a16:creationId xmlns:a16="http://schemas.microsoft.com/office/drawing/2014/main" id="{21E7B6E4-3F40-6621-D874-CBA686E1DB28}"/>
+              </a:ext>
+            </a:extLst>
+          </p:cNvPr>
+          <p:cNvSpPr>
+            <a:spLocks noGrp="1"/>
+          </p:cNvSpPr>
+          <p:nvPr>
+            <p:ph type="title"/>
+          </p:nvPr>
+        </p:nvSpPr>
+        <p:spPr/>
+        <p:txBody>
+          <a:bodyPr/>
+          <a:lstStyle/>
+          <a:p>
+            <a:r>
+              <a:rPr lang="en-GB" dirty="0"/>
+              <a:t>MINI PROJECT 4 </a:t>
+            </a:r>
+          </a:p>
+        </p:txBody>
+      </p:sp>
+      <p:graphicFrame>
+        <p:nvGraphicFramePr>
+          <p:cNvPr id="8" name="Content Placeholder 2">
+            <a:extLst>
+              <a:ext uri="{FF2B5EF4-FFF2-40B4-BE49-F238E27FC236}">
+                <a16:creationId xmlns:a16="http://schemas.microsoft.com/office/drawing/2014/main" id="{DAD45756-C582-34CE-5214-94FFBA9FD214}"/>
+              </a:ext>
+            </a:extLst>
+          </p:cNvPr>
+          <p:cNvGraphicFramePr>
+            <a:graphicFrameLocks noGrp="1"/>
+          </p:cNvGraphicFramePr>
+          <p:nvPr>
+            <p:ph idx="1"/>
+            <p:extLst>
+              <p:ext uri="{D42A27DB-BD31-4B8C-83A1-F6EECF244321}">
+                <p14:modId xmlns:p14="http://schemas.microsoft.com/office/powerpoint/2010/main" val="1500467452"/>
+              </p:ext>
+            </p:extLst>
+          </p:nvPr>
+        </p:nvGraphicFramePr>
+        <p:xfrm>
+          <a:off x="4936518" y="263236"/>
+          <a:ext cx="7158499" cy="6470073"/>
+        </p:xfrm>
+        <a:graphic>
+          <a:graphicData uri="http://schemas.openxmlformats.org/drawingml/2006/diagram">
+            <dgm:relIds xmlns:dgm="http://schemas.openxmlformats.org/drawingml/2006/diagram" xmlns:r="http://schemas.openxmlformats.org/officeDocument/2006/relationships" r:dm="rId2" r:lo="rId3" r:qs="rId4" r:cs="rId5"/>
+          </a:graphicData>
+        </a:graphic>
+      </p:graphicFrame>
+      <p:sp>
+        <p:nvSpPr>
+          <p:cNvPr id="4" name="Text Placeholder 3">
+            <a:extLst>
+              <a:ext uri="{FF2B5EF4-FFF2-40B4-BE49-F238E27FC236}">
+                <a16:creationId xmlns:a16="http://schemas.microsoft.com/office/drawing/2014/main" id="{32AAEF80-7B1D-27AF-7A58-6418F0C4049A}"/>
+              </a:ext>
+            </a:extLst>
+          </p:cNvPr>
+          <p:cNvSpPr>
+            <a:spLocks noGrp="1"/>
+          </p:cNvSpPr>
+          <p:nvPr>
+            <p:ph type="body" sz="half" idx="2"/>
+          </p:nvPr>
+        </p:nvSpPr>
+        <p:spPr/>
+        <p:txBody>
+          <a:bodyPr>
+            <a:normAutofit fontScale="92500" lnSpcReduction="20000"/>
+          </a:bodyPr>
+          <a:lstStyle/>
+          <a:p>
+            <a:r>
+              <a:rPr lang="en-GB" sz="2800" dirty="0"/>
+              <a:t>WHAT WAS GIVEN : </a:t>
+            </a:r>
+          </a:p>
+          <a:p>
+            <a:r>
+              <a:rPr lang="en-GB" sz="2300" dirty="0"/>
+              <a:t>Write a report about online safety.</a:t>
+            </a:r>
+          </a:p>
+          <a:p>
+            <a:r>
+              <a:rPr lang="en-GB" sz="2300" dirty="0"/>
+              <a:t>Cover passwords, 2FA, phishing, devices, and public Wi-Fi.</a:t>
+            </a:r>
+          </a:p>
+          <a:p>
+            <a:r>
+              <a:rPr lang="en-GB" sz="2300" dirty="0"/>
+              <a:t>Use reliable sources and Harvard references.</a:t>
+            </a:r>
+          </a:p>
+          <a:p>
+            <a:endParaRPr lang="en-GB" sz="2800" dirty="0"/>
+          </a:p>
+          <a:p>
+            <a:endParaRPr lang="en-GB" dirty="0"/>
+          </a:p>
+        </p:txBody>
+      </p:sp>
+    </p:spTree>
+    <p:extLst>
+      <p:ext uri="{BB962C8B-B14F-4D97-AF65-F5344CB8AC3E}">
+        <p14:creationId xmlns:p14="http://schemas.microsoft.com/office/powerpoint/2010/main" val="1398158183"/>
+      </p:ext>
+    </p:extLst>
+  </p:cSld>
+  <p:clrMapOvr>
+    <a:masterClrMapping/>
+  </p:clrMapOvr>
+</p:sld>
+</file>
+
+<file path=ppt/slides/slide14.xml><?xml version="1.0" encoding="utf-8"?>
+<p:sld xmlns:a="http://schemas.openxmlformats.org/drawingml/2006/main" xmlns:r="http://schemas.openxmlformats.org/officeDocument/2006/relationships" xmlns:p="http://schemas.openxmlformats.org/presentationml/2006/main">
+  <p:cSld>
+    <p:spTree>
+      <p:nvGrpSpPr>
+        <p:cNvPr id="1" name=""/>
+        <p:cNvGrpSpPr/>
+        <p:nvPr/>
+      </p:nvGrpSpPr>
+      <p:grpSpPr>
+        <a:xfrm>
+          <a:off x="0" y="0"/>
+          <a:ext cx="0" cy="0"/>
+          <a:chOff x="0" y="0"/>
+          <a:chExt cx="0" cy="0"/>
+        </a:xfrm>
+      </p:grpSpPr>
+      <p:sp>
+        <p:nvSpPr>
+          <p:cNvPr id="2" name="Title 1">
+            <a:extLst>
+              <a:ext uri="{FF2B5EF4-FFF2-40B4-BE49-F238E27FC236}">
+                <a16:creationId xmlns:a16="http://schemas.microsoft.com/office/drawing/2014/main" id="{28DE5A55-2B6F-01E0-9D63-26643100C6C1}"/>
+              </a:ext>
+            </a:extLst>
+          </p:cNvPr>
+          <p:cNvSpPr>
+            <a:spLocks noGrp="1"/>
+          </p:cNvSpPr>
+          <p:nvPr>
+            <p:ph type="title"/>
+          </p:nvPr>
+        </p:nvSpPr>
+        <p:spPr/>
+        <p:txBody>
+          <a:bodyPr/>
+          <a:lstStyle/>
+          <a:p>
+            <a:r>
+              <a:rPr lang="en-GB" dirty="0"/>
+              <a:t>MINI PROJECT 4 </a:t>
+            </a:r>
+          </a:p>
+        </p:txBody>
+      </p:sp>
+      <p:pic>
+        <p:nvPicPr>
+          <p:cNvPr id="6" name="Content Placeholder 5">
+            <a:extLst>
+              <a:ext uri="{FF2B5EF4-FFF2-40B4-BE49-F238E27FC236}">
+                <a16:creationId xmlns:a16="http://schemas.microsoft.com/office/drawing/2014/main" id="{5CA2F2FC-1617-F436-531B-DE79AEC5C9EE}"/>
+              </a:ext>
+            </a:extLst>
+          </p:cNvPr>
+          <p:cNvPicPr>
+            <a:picLocks noGrp="1" noChangeAspect="1"/>
+          </p:cNvPicPr>
+          <p:nvPr>
+            <p:ph idx="1"/>
+          </p:nvPr>
+        </p:nvPicPr>
+        <p:blipFill>
+          <a:blip r:embed="rId2">
+            <a:extLst>
+              <a:ext uri="{28A0092B-C50C-407E-A947-70E740481C1C}">
+                <a14:useLocalDpi xmlns:a14="http://schemas.microsoft.com/office/drawing/2010/main" val="0"/>
+              </a:ext>
+            </a:extLst>
+          </a:blip>
+          <a:stretch>
+            <a:fillRect/>
+          </a:stretch>
+        </p:blipFill>
+        <p:spPr>
+          <a:xfrm>
+            <a:off x="4451351" y="1030287"/>
+            <a:ext cx="3289299" cy="2678113"/>
+          </a:xfrm>
+          <a:prstGeom prst="rect">
+            <a:avLst/>
+          </a:prstGeom>
+        </p:spPr>
+      </p:pic>
+      <p:sp>
+        <p:nvSpPr>
+          <p:cNvPr id="4" name="Text Placeholder 3">
+            <a:extLst>
+              <a:ext uri="{FF2B5EF4-FFF2-40B4-BE49-F238E27FC236}">
+                <a16:creationId xmlns:a16="http://schemas.microsoft.com/office/drawing/2014/main" id="{990E6E06-4689-4435-47DE-F2D418B86E7F}"/>
+              </a:ext>
+            </a:extLst>
+          </p:cNvPr>
+          <p:cNvSpPr>
+            <a:spLocks noGrp="1"/>
+          </p:cNvSpPr>
+          <p:nvPr>
+            <p:ph type="body" sz="half" idx="2"/>
+          </p:nvPr>
+        </p:nvSpPr>
+        <p:spPr/>
+        <p:txBody>
+          <a:bodyPr/>
+          <a:lstStyle/>
+          <a:p>
+            <a:r>
+              <a:rPr lang="en-GB" dirty="0"/>
+              <a:t>EVIDENCE </a:t>
+            </a:r>
+          </a:p>
+        </p:txBody>
+      </p:sp>
+      <p:pic>
+        <p:nvPicPr>
+          <p:cNvPr id="8" name="Picture 7">
+            <a:extLst>
+              <a:ext uri="{FF2B5EF4-FFF2-40B4-BE49-F238E27FC236}">
+                <a16:creationId xmlns:a16="http://schemas.microsoft.com/office/drawing/2014/main" id="{0987836A-8383-3889-319F-25D446B8F887}"/>
+              </a:ext>
+            </a:extLst>
+          </p:cNvPr>
+          <p:cNvPicPr>
+            <a:picLocks noChangeAspect="1"/>
+          </p:cNvPicPr>
+          <p:nvPr/>
+        </p:nvPicPr>
+        <p:blipFill>
+          <a:blip r:embed="rId3">
+            <a:extLst>
+              <a:ext uri="{28A0092B-C50C-407E-A947-70E740481C1C}">
+                <a14:useLocalDpi xmlns:a14="http://schemas.microsoft.com/office/drawing/2010/main" val="0"/>
+              </a:ext>
+            </a:extLst>
+          </a:blip>
+          <a:stretch>
+            <a:fillRect/>
+          </a:stretch>
+        </p:blipFill>
+        <p:spPr>
+          <a:xfrm>
+            <a:off x="7740650" y="1371601"/>
+            <a:ext cx="3644900" cy="2286000"/>
+          </a:xfrm>
+          <a:prstGeom prst="rect">
+            <a:avLst/>
+          </a:prstGeom>
+        </p:spPr>
+      </p:pic>
+      <p:pic>
+        <p:nvPicPr>
+          <p:cNvPr id="10" name="Picture 9">
+            <a:extLst>
+              <a:ext uri="{FF2B5EF4-FFF2-40B4-BE49-F238E27FC236}">
+                <a16:creationId xmlns:a16="http://schemas.microsoft.com/office/drawing/2014/main" id="{C5D3BE17-054F-9458-1D32-A7B6B5A893B1}"/>
+              </a:ext>
+            </a:extLst>
+          </p:cNvPr>
+          <p:cNvPicPr>
+            <a:picLocks noChangeAspect="1"/>
+          </p:cNvPicPr>
+          <p:nvPr/>
+        </p:nvPicPr>
+        <p:blipFill>
+          <a:blip r:embed="rId4">
+            <a:extLst>
+              <a:ext uri="{28A0092B-C50C-407E-A947-70E740481C1C}">
+                <a14:useLocalDpi xmlns:a14="http://schemas.microsoft.com/office/drawing/2010/main" val="0"/>
+              </a:ext>
+            </a:extLst>
+          </a:blip>
+          <a:stretch>
+            <a:fillRect/>
+          </a:stretch>
+        </p:blipFill>
+        <p:spPr>
+          <a:xfrm>
+            <a:off x="4572000" y="3905250"/>
+            <a:ext cx="5067300" cy="2787650"/>
+          </a:xfrm>
+          <a:prstGeom prst="rect">
+            <a:avLst/>
+          </a:prstGeom>
+        </p:spPr>
+      </p:pic>
+    </p:spTree>
+    <p:extLst>
+      <p:ext uri="{BB962C8B-B14F-4D97-AF65-F5344CB8AC3E}">
+        <p14:creationId xmlns:p14="http://schemas.microsoft.com/office/powerpoint/2010/main" val="4108860665"/>
+      </p:ext>
+    </p:extLst>
+  </p:cSld>
+  <p:clrMapOvr>
+    <a:masterClrMapping/>
+  </p:clrMapOvr>
+</p:sld>
+</file>
+
+<file path=ppt/slides/slide15.xml><?xml version="1.0" encoding="utf-8"?>
+<p:sld xmlns:a="http://schemas.openxmlformats.org/drawingml/2006/main" xmlns:r="http://schemas.openxmlformats.org/officeDocument/2006/relationships" xmlns:p="http://schemas.openxmlformats.org/presentationml/2006/main">
+  <p:cSld>
+    <p:spTree>
+      <p:nvGrpSpPr>
+        <p:cNvPr id="1" name=""/>
+        <p:cNvGrpSpPr/>
+        <p:nvPr/>
+      </p:nvGrpSpPr>
+      <p:grpSpPr>
+        <a:xfrm>
+          <a:off x="0" y="0"/>
+          <a:ext cx="0" cy="0"/>
+          <a:chOff x="0" y="0"/>
+          <a:chExt cx="0" cy="0"/>
+        </a:xfrm>
+      </p:grpSpPr>
+      <p:sp>
+        <p:nvSpPr>
+          <p:cNvPr id="2" name="Title 1">
+            <a:extLst>
+              <a:ext uri="{FF2B5EF4-FFF2-40B4-BE49-F238E27FC236}">
+                <a16:creationId xmlns:a16="http://schemas.microsoft.com/office/drawing/2014/main" id="{0A662AB7-C83C-DC63-CCF5-ECA3B5A5674B}"/>
+              </a:ext>
+            </a:extLst>
+          </p:cNvPr>
+          <p:cNvSpPr>
+            <a:spLocks noGrp="1"/>
+          </p:cNvSpPr>
+          <p:nvPr>
+            <p:ph type="title"/>
+          </p:nvPr>
+        </p:nvSpPr>
+        <p:spPr/>
+        <p:txBody>
+          <a:bodyPr/>
+          <a:lstStyle/>
+          <a:p>
+            <a:r>
+              <a:rPr lang="en-GB" dirty="0"/>
+              <a:t>LIVE DEMO ON GITHUB </a:t>
+            </a:r>
+          </a:p>
+        </p:txBody>
+      </p:sp>
+      <p:graphicFrame>
+        <p:nvGraphicFramePr>
+          <p:cNvPr id="7" name="Content Placeholder 2">
+            <a:extLst>
+              <a:ext uri="{FF2B5EF4-FFF2-40B4-BE49-F238E27FC236}">
+                <a16:creationId xmlns:a16="http://schemas.microsoft.com/office/drawing/2014/main" id="{EC02A8C8-7383-A191-5BB7-6943A5073285}"/>
+              </a:ext>
+            </a:extLst>
+          </p:cNvPr>
+          <p:cNvGraphicFramePr>
+            <a:graphicFrameLocks noGrp="1"/>
+          </p:cNvGraphicFramePr>
+          <p:nvPr>
+            <p:ph idx="1"/>
+            <p:extLst>
+              <p:ext uri="{D42A27DB-BD31-4B8C-83A1-F6EECF244321}">
+                <p14:modId xmlns:p14="http://schemas.microsoft.com/office/powerpoint/2010/main" val="142893457"/>
+              </p:ext>
+            </p:extLst>
+          </p:nvPr>
+        </p:nvGraphicFramePr>
+        <p:xfrm>
+          <a:off x="640080" y="2147455"/>
+          <a:ext cx="10890928" cy="4391890"/>
+        </p:xfrm>
+        <a:graphic>
+          <a:graphicData uri="http://schemas.openxmlformats.org/drawingml/2006/diagram">
+            <dgm:relIds xmlns:dgm="http://schemas.openxmlformats.org/drawingml/2006/diagram" xmlns:r="http://schemas.openxmlformats.org/officeDocument/2006/relationships" r:dm="rId2" r:lo="rId3" r:qs="rId4" r:cs="rId5"/>
+          </a:graphicData>
+        </a:graphic>
+      </p:graphicFrame>
+    </p:spTree>
+    <p:extLst>
+      <p:ext uri="{BB962C8B-B14F-4D97-AF65-F5344CB8AC3E}">
+        <p14:creationId xmlns:p14="http://schemas.microsoft.com/office/powerpoint/2010/main" val="1769892932"/>
+      </p:ext>
+    </p:extLst>
+  </p:cSld>
+  <p:clrMapOvr>
+    <a:masterClrMapping/>
+  </p:clrMapOvr>
+</p:sld>
+</file>
+
+<file path=ppt/slides/slide16.xml><?xml version="1.0" encoding="utf-8"?>
+<p:sld xmlns:a="http://schemas.openxmlformats.org/drawingml/2006/main" xmlns:r="http://schemas.openxmlformats.org/officeDocument/2006/relationships" xmlns:p="http://schemas.openxmlformats.org/presentationml/2006/main">
+  <p:cSld>
+    <p:bg>
+      <p:bgPr>
+        <a:solidFill>
+          <a:schemeClr val="bg1"/>
+        </a:solidFill>
+        <a:effectLst/>
+      </p:bgPr>
+    </p:bg>
+    <p:spTree>
+      <p:nvGrpSpPr>
+        <p:cNvPr id="1" name=""/>
+        <p:cNvGrpSpPr/>
+        <p:nvPr/>
+      </p:nvGrpSpPr>
+      <p:grpSpPr>
+        <a:xfrm>
+          <a:off x="0" y="0"/>
+          <a:ext cx="0" cy="0"/>
+          <a:chOff x="0" y="0"/>
+          <a:chExt cx="0" cy="0"/>
+        </a:xfrm>
+      </p:grpSpPr>
+      <p:sp useBgFill="1">
+        <p:nvSpPr>
+          <p:cNvPr id="10" name="Rectangle 9">
+            <a:extLst>
+              <a:ext uri="{FF2B5EF4-FFF2-40B4-BE49-F238E27FC236}">
+                <a16:creationId xmlns:a16="http://schemas.microsoft.com/office/drawing/2014/main" id="{744CAA32-F237-419C-A2DD-43C28D920D3C}"/>
+              </a:ext>
+              <a:ext uri="{C183D7F6-B498-43B3-948B-1728B52AA6E4}">
+                <adec:decorative xmlns:adec="http://schemas.microsoft.com/office/drawing/2017/decorative" val="1"/>
+              </a:ext>
+            </a:extLst>
+          </p:cNvPr>
+          <p:cNvSpPr>
+            <a:spLocks noGrp="1" noRot="1" noChangeAspect="1" noMove="1" noResize="1" noEditPoints="1" noAdjustHandles="1" noChangeArrowheads="1" noChangeShapeType="1" noTextEdit="1"/>
+          </p:cNvSpPr>
+          <p:nvPr>
+            <p:extLst>
+              <p:ext uri="{386F3935-93C4-4BCD-93E2-E3B085C9AB24}">
+                <p16:designElem xmlns:p16="http://schemas.microsoft.com/office/powerpoint/2015/main" val="1"/>
+              </p:ext>
+            </p:extLst>
+          </p:nvPr>
+        </p:nvSpPr>
+        <p:spPr>
+          <a:xfrm>
+            <a:off x="0" y="0"/>
+            <a:ext cx="12192000" cy="6858000"/>
+          </a:xfrm>
+          <a:prstGeom prst="rect">
+            <a:avLst/>
+          </a:prstGeom>
+          <a:ln w="12700" cap="flat" cmpd="sng" algn="ctr">
+            <a:noFill/>
+            <a:prstDash val="solid"/>
+            <a:miter lim="800000"/>
+          </a:ln>
+          <a:effectLst/>
+          <a:extLst>
+            <a:ext uri="{91240B29-F687-4F45-9708-019B960494DF}">
+              <a14:hiddenLine xmlns:a14="http://schemas.microsoft.com/office/drawing/2010/main" w="12700" cap="flat" cmpd="sng" algn="ctr">
+                <a:solidFill>
+                  <a:schemeClr val="accent1">
+                    <a:shade val="50000"/>
+                  </a:schemeClr>
+                </a:solidFill>
+                <a:prstDash val="solid"/>
+                <a:miter lim="800000"/>
+              </a14:hiddenLine>
+            </a:ext>
+          </a:extLst>
+        </p:spPr>
+        <p:style>
+          <a:lnRef idx="2">
+            <a:schemeClr val="accent1">
+              <a:shade val="50000"/>
+            </a:schemeClr>
+          </a:lnRef>
+          <a:fillRef idx="1">
+            <a:schemeClr val="accent1"/>
+          </a:fillRef>
+          <a:effectRef idx="0">
+            <a:schemeClr val="accent1"/>
+          </a:effectRef>
+          <a:fontRef idx="minor">
+            <a:schemeClr val="lt1"/>
+          </a:fontRef>
+        </p:style>
+        <p:txBody>
+          <a:bodyPr rtlCol="0" anchor="ctr"/>
+          <a:lstStyle/>
+          <a:p>
+            <a:pPr algn="ctr"/>
+            <a:endParaRPr lang="en-US"/>
+          </a:p>
+        </p:txBody>
+      </p:sp>
+      <p:sp>
+        <p:nvSpPr>
+          <p:cNvPr id="2" name="Title 1">
+            <a:extLst>
+              <a:ext uri="{FF2B5EF4-FFF2-40B4-BE49-F238E27FC236}">
+                <a16:creationId xmlns:a16="http://schemas.microsoft.com/office/drawing/2014/main" id="{EB07FF24-C19B-E76B-80D5-6F1E42DEF644}"/>
+              </a:ext>
+            </a:extLst>
+          </p:cNvPr>
+          <p:cNvSpPr>
+            <a:spLocks noGrp="1"/>
+          </p:cNvSpPr>
+          <p:nvPr>
+            <p:ph type="title"/>
+          </p:nvPr>
+        </p:nvSpPr>
+        <p:spPr>
+          <a:xfrm>
+            <a:off x="640080" y="1371600"/>
+            <a:ext cx="5737859" cy="1097280"/>
+          </a:xfrm>
+        </p:spPr>
+        <p:txBody>
+          <a:bodyPr>
+            <a:normAutofit/>
+          </a:bodyPr>
+          <a:lstStyle/>
+          <a:p>
+            <a:r>
+              <a:rPr lang="en-GB" dirty="0"/>
+              <a:t>REFLECTION </a:t>
+            </a:r>
+          </a:p>
+        </p:txBody>
+      </p:sp>
+      <p:cxnSp>
+        <p:nvCxnSpPr>
+          <p:cNvPr id="12" name="Straight Connector 11">
+            <a:extLst>
+              <a:ext uri="{FF2B5EF4-FFF2-40B4-BE49-F238E27FC236}">
+                <a16:creationId xmlns:a16="http://schemas.microsoft.com/office/drawing/2014/main" id="{753FE100-D0AB-4AE2-824B-60CFA31EC6A2}"/>
+              </a:ext>
+              <a:ext uri="{C183D7F6-B498-43B3-948B-1728B52AA6E4}">
+                <adec:decorative xmlns:adec="http://schemas.microsoft.com/office/drawing/2017/decorative" val="1"/>
+              </a:ext>
+            </a:extLst>
+          </p:cNvPr>
+          <p:cNvCxnSpPr>
+            <a:cxnSpLocks noGrp="1" noRot="1" noChangeAspect="1" noMove="1" noResize="1" noEditPoints="1" noAdjustHandles="1" noChangeArrowheads="1" noChangeShapeType="1"/>
+          </p:cNvCxnSpPr>
+          <p:nvPr>
+            <p:extLst>
+              <p:ext uri="{386F3935-93C4-4BCD-93E2-E3B085C9AB24}">
+                <p16:designElem xmlns:p16="http://schemas.microsoft.com/office/powerpoint/2015/main" val="1"/>
+              </p:ext>
+            </p:extLst>
+          </p:nvPr>
+        </p:nvCxnSpPr>
+        <p:spPr>
+          <a:xfrm>
+            <a:off x="713232" y="1031001"/>
+            <a:ext cx="978862" cy="0"/>
+          </a:xfrm>
+          <a:prstGeom prst="line">
+            <a:avLst/>
+          </a:prstGeom>
+          <a:ln w="76200"/>
+        </p:spPr>
+        <p:style>
+          <a:lnRef idx="1">
+            <a:schemeClr val="accent1"/>
+          </a:lnRef>
+          <a:fillRef idx="0">
+            <a:schemeClr val="accent1"/>
+          </a:fillRef>
+          <a:effectRef idx="0">
+            <a:schemeClr val="accent1"/>
+          </a:effectRef>
+          <a:fontRef idx="minor">
+            <a:schemeClr val="tx1"/>
+          </a:fontRef>
+        </p:style>
+      </p:cxnSp>
+      <p:sp>
+        <p:nvSpPr>
+          <p:cNvPr id="3" name="Content Placeholder 2">
+            <a:extLst>
+              <a:ext uri="{FF2B5EF4-FFF2-40B4-BE49-F238E27FC236}">
+                <a16:creationId xmlns:a16="http://schemas.microsoft.com/office/drawing/2014/main" id="{CF0F8E8C-BBE1-78BE-2C3C-473380A93BF2}"/>
+              </a:ext>
+            </a:extLst>
+          </p:cNvPr>
+          <p:cNvSpPr>
+            <a:spLocks noGrp="1"/>
+          </p:cNvSpPr>
+          <p:nvPr>
+            <p:ph idx="1"/>
+          </p:nvPr>
+        </p:nvSpPr>
+        <p:spPr>
+          <a:xfrm>
+            <a:off x="640080" y="2216727"/>
+            <a:ext cx="7076902" cy="4641273"/>
+          </a:xfrm>
+        </p:spPr>
+        <p:txBody>
+          <a:bodyPr>
+            <a:normAutofit/>
+          </a:bodyPr>
+          <a:lstStyle/>
+          <a:p>
+            <a:pPr marL="0" indent="0">
+              <a:buNone/>
+            </a:pPr>
+            <a:r>
+              <a:rPr lang="en-GB" sz="3600" b="1" dirty="0"/>
+              <a:t>Learning Journey:</a:t>
+            </a:r>
+          </a:p>
+          <a:p>
+            <a:pPr marL="0" indent="0">
+              <a:buNone/>
+            </a:pPr>
+            <a:endParaRPr lang="en-GB" sz="3600" b="1" dirty="0"/>
+          </a:p>
+          <a:p>
+            <a:r>
+              <a:rPr lang="en-GB" sz="2400" dirty="0"/>
+              <a:t>Learned new skills and software.</a:t>
+            </a:r>
+          </a:p>
+          <a:p>
+            <a:r>
+              <a:rPr lang="en-GB" sz="2400" dirty="0"/>
+              <a:t>Faced difficulties but solved them through practice.</a:t>
+            </a:r>
+          </a:p>
+          <a:p>
+            <a:r>
+              <a:rPr lang="en-GB" sz="2400" dirty="0"/>
+              <a:t>Improved my teamwork and problem-solving.</a:t>
+            </a:r>
+          </a:p>
+          <a:p>
+            <a:r>
+              <a:rPr lang="en-GB" sz="2400" dirty="0"/>
+              <a:t>Gained more knowledge and confidence.</a:t>
+            </a:r>
+          </a:p>
+          <a:p>
+            <a:endParaRPr lang="en-GB" dirty="0"/>
+          </a:p>
+        </p:txBody>
+      </p:sp>
+      <p:pic>
+        <p:nvPicPr>
+          <p:cNvPr id="7" name="Graphic 6" descr="Head with Gears">
+            <a:extLst>
+              <a:ext uri="{FF2B5EF4-FFF2-40B4-BE49-F238E27FC236}">
+                <a16:creationId xmlns:a16="http://schemas.microsoft.com/office/drawing/2014/main" id="{2E59A458-82EB-1E27-21E7-E69B0F1D568D}"/>
+              </a:ext>
+            </a:extLst>
+          </p:cNvPr>
+          <p:cNvPicPr>
+            <a:picLocks noChangeAspect="1"/>
+          </p:cNvPicPr>
+          <p:nvPr/>
+        </p:nvPicPr>
+        <p:blipFill>
+          <a:blip>
+            <a:extLst>
+              <a:ext uri="{28A0092B-C50C-407E-A947-70E740481C1C}">
+                <a14:useLocalDpi xmlns:a14="http://schemas.microsoft.com/office/drawing/2010/main" val="0"/>
+              </a:ext>
+              <a:ext uri="{96DAC541-7B7A-43D3-8B79-37D633B846F1}">
+                <asvg:svgBlip xmlns:asvg="http://schemas.microsoft.com/office/drawing/2016/SVG/main" r:embed="rId2"/>
+              </a:ext>
+            </a:extLst>
+          </a:blip>
+          <a:stretch>
+            <a:fillRect/>
+          </a:stretch>
+        </p:blipFill>
+        <p:spPr>
+          <a:xfrm>
+            <a:off x="7155179" y="1924386"/>
+            <a:ext cx="4375829" cy="4375829"/>
+          </a:xfrm>
+          <a:prstGeom prst="rect">
+            <a:avLst/>
+          </a:prstGeom>
+        </p:spPr>
+      </p:pic>
+    </p:spTree>
+    <p:extLst>
+      <p:ext uri="{BB962C8B-B14F-4D97-AF65-F5344CB8AC3E}">
+        <p14:creationId xmlns:p14="http://schemas.microsoft.com/office/powerpoint/2010/main" val="922459036"/>
+      </p:ext>
+    </p:extLst>
+  </p:cSld>
+  <p:clrMapOvr>
+    <a:masterClrMapping/>
+  </p:clrMapOvr>
+</p:sld>
+</file>
+
+<file path=ppt/slides/slide17.xml><?xml version="1.0" encoding="utf-8"?>
+<p:sld xmlns:a="http://schemas.openxmlformats.org/drawingml/2006/main" xmlns:r="http://schemas.openxmlformats.org/officeDocument/2006/relationships" xmlns:p="http://schemas.openxmlformats.org/presentationml/2006/main">
+  <p:cSld>
     <p:bg>
       <p:bgPr>
         <a:solidFill>
@@ -26184,7 +27353,7 @@
               <a:buNone/>
             </a:pPr>
             <a:r>
-              <a:rPr lang="en-US" sz="1800" b="1" cap="all" spc="300" dirty="0">
+              <a:rPr lang="en-US" sz="1800" b="1" cap="all" spc="300">
                 <a:solidFill>
                   <a:srgbClr val="FFFFFF"/>
                 </a:solidFill>
@@ -27018,6 +28187,166 @@
           <p:cNvPr id="2" name="Title 1">
             <a:extLst>
               <a:ext uri="{FF2B5EF4-FFF2-40B4-BE49-F238E27FC236}">
+                <a16:creationId xmlns:a16="http://schemas.microsoft.com/office/drawing/2014/main" id="{2AAD25F6-0783-0E1C-A837-D965AD679F5B}"/>
+              </a:ext>
+            </a:extLst>
+          </p:cNvPr>
+          <p:cNvSpPr>
+            <a:spLocks noGrp="1"/>
+          </p:cNvSpPr>
+          <p:nvPr>
+            <p:ph type="title"/>
+          </p:nvPr>
+        </p:nvSpPr>
+        <p:spPr/>
+        <p:txBody>
+          <a:bodyPr/>
+          <a:lstStyle/>
+          <a:p>
+            <a:r>
+              <a:rPr lang="en-GB" dirty="0"/>
+              <a:t>MINI PROJECT ONE </a:t>
+            </a:r>
+          </a:p>
+        </p:txBody>
+      </p:sp>
+      <p:pic>
+        <p:nvPicPr>
+          <p:cNvPr id="6" name="Content Placeholder 5">
+            <a:extLst>
+              <a:ext uri="{FF2B5EF4-FFF2-40B4-BE49-F238E27FC236}">
+                <a16:creationId xmlns:a16="http://schemas.microsoft.com/office/drawing/2014/main" id="{2F9AF904-61AD-75F3-E3F1-4FE9AE9612BD}"/>
+              </a:ext>
+            </a:extLst>
+          </p:cNvPr>
+          <p:cNvPicPr>
+            <a:picLocks noGrp="1" noChangeAspect="1"/>
+          </p:cNvPicPr>
+          <p:nvPr>
+            <p:ph idx="1"/>
+          </p:nvPr>
+        </p:nvPicPr>
+        <p:blipFill>
+          <a:blip r:embed="rId2">
+            <a:extLst>
+              <a:ext uri="{28A0092B-C50C-407E-A947-70E740481C1C}">
+                <a14:useLocalDpi xmlns:a14="http://schemas.microsoft.com/office/drawing/2010/main" val="0"/>
+              </a:ext>
+            </a:extLst>
+          </a:blip>
+          <a:stretch>
+            <a:fillRect/>
+          </a:stretch>
+        </p:blipFill>
+        <p:spPr>
+          <a:xfrm>
+            <a:off x="5609351" y="1030288"/>
+            <a:ext cx="5250023" cy="2868612"/>
+          </a:xfrm>
+          <a:prstGeom prst="rect">
+            <a:avLst/>
+          </a:prstGeom>
+        </p:spPr>
+      </p:pic>
+      <p:sp>
+        <p:nvSpPr>
+          <p:cNvPr id="4" name="Text Placeholder 3">
+            <a:extLst>
+              <a:ext uri="{FF2B5EF4-FFF2-40B4-BE49-F238E27FC236}">
+                <a16:creationId xmlns:a16="http://schemas.microsoft.com/office/drawing/2014/main" id="{B87F8A01-D0E6-F043-6B01-9230F0575AFD}"/>
+              </a:ext>
+            </a:extLst>
+          </p:cNvPr>
+          <p:cNvSpPr>
+            <a:spLocks noGrp="1"/>
+          </p:cNvSpPr>
+          <p:nvPr>
+            <p:ph type="body" sz="half" idx="2"/>
+          </p:nvPr>
+        </p:nvSpPr>
+        <p:spPr/>
+        <p:txBody>
+          <a:bodyPr/>
+          <a:lstStyle/>
+          <a:p>
+            <a:r>
+              <a:rPr lang="en-GB" dirty="0"/>
+              <a:t>EVIDENCE </a:t>
+            </a:r>
+          </a:p>
+        </p:txBody>
+      </p:sp>
+      <p:pic>
+        <p:nvPicPr>
+          <p:cNvPr id="7" name="Picture 6">
+            <a:extLst>
+              <a:ext uri="{FF2B5EF4-FFF2-40B4-BE49-F238E27FC236}">
+                <a16:creationId xmlns:a16="http://schemas.microsoft.com/office/drawing/2014/main" id="{61A53EF9-4EB1-BF52-291B-A8A5C6D79962}"/>
+              </a:ext>
+            </a:extLst>
+          </p:cNvPr>
+          <p:cNvPicPr>
+            <a:picLocks noChangeAspect="1"/>
+          </p:cNvPicPr>
+          <p:nvPr/>
+        </p:nvPicPr>
+        <p:blipFill>
+          <a:blip r:embed="rId3" cstate="print">
+            <a:extLst>
+              <a:ext uri="{28A0092B-C50C-407E-A947-70E740481C1C}">
+                <a14:useLocalDpi xmlns:a14="http://schemas.microsoft.com/office/drawing/2010/main" val="0"/>
+              </a:ext>
+            </a:extLst>
+          </a:blip>
+          <a:stretch>
+            <a:fillRect/>
+          </a:stretch>
+        </p:blipFill>
+        <p:spPr>
+          <a:xfrm>
+            <a:off x="5609351" y="3968750"/>
+            <a:ext cx="4461749" cy="2501900"/>
+          </a:xfrm>
+          <a:prstGeom prst="rect">
+            <a:avLst/>
+          </a:prstGeom>
+        </p:spPr>
+      </p:pic>
+    </p:spTree>
+    <p:extLst>
+      <p:ext uri="{BB962C8B-B14F-4D97-AF65-F5344CB8AC3E}">
+        <p14:creationId xmlns:p14="http://schemas.microsoft.com/office/powerpoint/2010/main" val="4165074436"/>
+      </p:ext>
+    </p:extLst>
+  </p:cSld>
+  <p:clrMapOvr>
+    <a:masterClrMapping/>
+  </p:clrMapOvr>
+</p:sld>
+</file>
+
+<file path=ppt/slides/slide6.xml><?xml version="1.0" encoding="utf-8"?>
+<p:sld xmlns:a="http://schemas.openxmlformats.org/drawingml/2006/main" xmlns:r="http://schemas.openxmlformats.org/officeDocument/2006/relationships" xmlns:p="http://schemas.openxmlformats.org/presentationml/2006/main">
+  <p:cSld>
+    <p:spTree>
+      <p:nvGrpSpPr>
+        <p:cNvPr id="1" name=""/>
+        <p:cNvGrpSpPr/>
+        <p:nvPr/>
+      </p:nvGrpSpPr>
+      <p:grpSpPr>
+        <a:xfrm>
+          <a:off x="0" y="0"/>
+          <a:ext cx="0" cy="0"/>
+          <a:chOff x="0" y="0"/>
+          <a:chExt cx="0" cy="0"/>
+        </a:xfrm>
+      </p:grpSpPr>
+      <p:sp>
+        <p:nvSpPr>
+          <p:cNvPr id="2" name="Title 1">
+            <a:extLst>
+              <a:ext uri="{FF2B5EF4-FFF2-40B4-BE49-F238E27FC236}">
                 <a16:creationId xmlns:a16="http://schemas.microsoft.com/office/drawing/2014/main" id="{83B16DA6-12F8-2F74-DF4A-AF391F13C759}"/>
               </a:ext>
             </a:extLst>
@@ -27139,140 +28468,6 @@
 </p:sld>
 </file>
 
-<file path=ppt/slides/slide6.xml><?xml version="1.0" encoding="utf-8"?>
-<p:sld xmlns:a="http://schemas.openxmlformats.org/drawingml/2006/main" xmlns:r="http://schemas.openxmlformats.org/officeDocument/2006/relationships" xmlns:p="http://schemas.openxmlformats.org/presentationml/2006/main">
-  <p:cSld>
-    <p:spTree>
-      <p:nvGrpSpPr>
-        <p:cNvPr id="1" name=""/>
-        <p:cNvGrpSpPr/>
-        <p:nvPr/>
-      </p:nvGrpSpPr>
-      <p:grpSpPr>
-        <a:xfrm>
-          <a:off x="0" y="0"/>
-          <a:ext cx="0" cy="0"/>
-          <a:chOff x="0" y="0"/>
-          <a:chExt cx="0" cy="0"/>
-        </a:xfrm>
-      </p:grpSpPr>
-      <p:sp>
-        <p:nvSpPr>
-          <p:cNvPr id="2" name="Title 1">
-            <a:extLst>
-              <a:ext uri="{FF2B5EF4-FFF2-40B4-BE49-F238E27FC236}">
-                <a16:creationId xmlns:a16="http://schemas.microsoft.com/office/drawing/2014/main" id="{63A3D83C-BEA6-9BB9-A3F4-BD9D97CC49A9}"/>
-              </a:ext>
-            </a:extLst>
-          </p:cNvPr>
-          <p:cNvSpPr>
-            <a:spLocks noGrp="1"/>
-          </p:cNvSpPr>
-          <p:nvPr>
-            <p:ph type="title"/>
-          </p:nvPr>
-        </p:nvSpPr>
-        <p:spPr/>
-        <p:txBody>
-          <a:bodyPr/>
-          <a:lstStyle/>
-          <a:p>
-            <a:r>
-              <a:rPr lang="en-GB" dirty="0"/>
-              <a:t>MINI PROJECT 3 </a:t>
-            </a:r>
-          </a:p>
-        </p:txBody>
-      </p:sp>
-      <p:graphicFrame>
-        <p:nvGraphicFramePr>
-          <p:cNvPr id="20" name="Content Placeholder 2">
-            <a:extLst>
-              <a:ext uri="{FF2B5EF4-FFF2-40B4-BE49-F238E27FC236}">
-                <a16:creationId xmlns:a16="http://schemas.microsoft.com/office/drawing/2014/main" id="{71ED9C43-7BAC-31B2-0E81-309AC9959BDD}"/>
-              </a:ext>
-            </a:extLst>
-          </p:cNvPr>
-          <p:cNvGraphicFramePr>
-            <a:graphicFrameLocks noGrp="1"/>
-          </p:cNvGraphicFramePr>
-          <p:nvPr>
-            <p:ph idx="1"/>
-            <p:extLst>
-              <p:ext uri="{D42A27DB-BD31-4B8C-83A1-F6EECF244321}">
-                <p14:modId xmlns:p14="http://schemas.microsoft.com/office/powerpoint/2010/main" val="2756422814"/>
-              </p:ext>
-            </p:extLst>
-          </p:nvPr>
-        </p:nvGraphicFramePr>
-        <p:xfrm>
-          <a:off x="4936518" y="457200"/>
-          <a:ext cx="7255481" cy="6400799"/>
-        </p:xfrm>
-        <a:graphic>
-          <a:graphicData uri="http://schemas.openxmlformats.org/drawingml/2006/diagram">
-            <dgm:relIds xmlns:dgm="http://schemas.openxmlformats.org/drawingml/2006/diagram" xmlns:r="http://schemas.openxmlformats.org/officeDocument/2006/relationships" r:dm="rId2" r:lo="rId3" r:qs="rId4" r:cs="rId5"/>
-          </a:graphicData>
-        </a:graphic>
-      </p:graphicFrame>
-      <p:sp>
-        <p:nvSpPr>
-          <p:cNvPr id="4" name="Text Placeholder 3">
-            <a:extLst>
-              <a:ext uri="{FF2B5EF4-FFF2-40B4-BE49-F238E27FC236}">
-                <a16:creationId xmlns:a16="http://schemas.microsoft.com/office/drawing/2014/main" id="{6B8670FE-C091-2A4A-37C8-99C1D19B2849}"/>
-              </a:ext>
-            </a:extLst>
-          </p:cNvPr>
-          <p:cNvSpPr>
-            <a:spLocks noGrp="1"/>
-          </p:cNvSpPr>
-          <p:nvPr>
-            <p:ph type="body" sz="half" idx="2"/>
-          </p:nvPr>
-        </p:nvSpPr>
-        <p:spPr/>
-        <p:txBody>
-          <a:bodyPr>
-            <a:normAutofit/>
-          </a:bodyPr>
-          <a:lstStyle/>
-          <a:p>
-            <a:r>
-              <a:rPr lang="en-GB" sz="2800" dirty="0"/>
-              <a:t>WHAT WAS GIVEN :</a:t>
-            </a:r>
-          </a:p>
-          <a:p>
-            <a:r>
-              <a:rPr lang="en-GB" sz="2400" dirty="0"/>
-              <a:t>Build an office network in Filius.</a:t>
-            </a:r>
-          </a:p>
-          <a:p>
-            <a:r>
-              <a:rPr lang="en-GB" sz="2400" dirty="0"/>
-              <a:t>Connect office PCs, servers, and cloud network.</a:t>
-            </a:r>
-          </a:p>
-          <a:p>
-            <a:endParaRPr lang="en-GB" sz="2800" dirty="0"/>
-          </a:p>
-        </p:txBody>
-      </p:sp>
-    </p:spTree>
-    <p:extLst>
-      <p:ext uri="{BB962C8B-B14F-4D97-AF65-F5344CB8AC3E}">
-        <p14:creationId xmlns:p14="http://schemas.microsoft.com/office/powerpoint/2010/main" val="3993447997"/>
-      </p:ext>
-    </p:extLst>
-  </p:cSld>
-  <p:clrMapOvr>
-    <a:masterClrMapping/>
-  </p:clrMapOvr>
-</p:sld>
-</file>
-
 <file path=ppt/slides/slide7.xml><?xml version="1.0" encoding="utf-8"?>
 <p:sld xmlns:a="http://schemas.openxmlformats.org/drawingml/2006/main" xmlns:r="http://schemas.openxmlformats.org/officeDocument/2006/relationships" xmlns:p="http://schemas.openxmlformats.org/presentationml/2006/main">
   <p:cSld>
@@ -27295,7 +28490,7 @@
           <p:cNvPr id="2" name="Title 1">
             <a:extLst>
               <a:ext uri="{FF2B5EF4-FFF2-40B4-BE49-F238E27FC236}">
-                <a16:creationId xmlns:a16="http://schemas.microsoft.com/office/drawing/2014/main" id="{21E7B6E4-3F40-6621-D874-CBA686E1DB28}"/>
+                <a16:creationId xmlns:a16="http://schemas.microsoft.com/office/drawing/2014/main" id="{B8926833-7D5E-2173-1364-D5EA126C6694}"/>
               </a:ext>
             </a:extLst>
           </p:cNvPr>
@@ -27313,48 +28508,17 @@
           <a:p>
             <a:r>
               <a:rPr lang="en-GB" dirty="0"/>
-              <a:t>MINI PROJECT 4 </a:t>
+              <a:t>MINI PROJECT 2 </a:t>
             </a:r>
           </a:p>
         </p:txBody>
       </p:sp>
-      <p:graphicFrame>
-        <p:nvGraphicFramePr>
-          <p:cNvPr id="8" name="Content Placeholder 2">
-            <a:extLst>
-              <a:ext uri="{FF2B5EF4-FFF2-40B4-BE49-F238E27FC236}">
-                <a16:creationId xmlns:a16="http://schemas.microsoft.com/office/drawing/2014/main" id="{DAD45756-C582-34CE-5214-94FFBA9FD214}"/>
-              </a:ext>
-            </a:extLst>
-          </p:cNvPr>
-          <p:cNvGraphicFramePr>
-            <a:graphicFrameLocks noGrp="1"/>
-          </p:cNvGraphicFramePr>
-          <p:nvPr>
-            <p:ph idx="1"/>
-            <p:extLst>
-              <p:ext uri="{D42A27DB-BD31-4B8C-83A1-F6EECF244321}">
-                <p14:modId xmlns:p14="http://schemas.microsoft.com/office/powerpoint/2010/main" val="1500467452"/>
-              </p:ext>
-            </p:extLst>
-          </p:nvPr>
-        </p:nvGraphicFramePr>
-        <p:xfrm>
-          <a:off x="4936518" y="263236"/>
-          <a:ext cx="7158499" cy="6470073"/>
-        </p:xfrm>
-        <a:graphic>
-          <a:graphicData uri="http://schemas.openxmlformats.org/drawingml/2006/diagram">
-            <dgm:relIds xmlns:dgm="http://schemas.openxmlformats.org/drawingml/2006/diagram" xmlns:r="http://schemas.openxmlformats.org/officeDocument/2006/relationships" r:dm="rId2" r:lo="rId3" r:qs="rId4" r:cs="rId5"/>
-          </a:graphicData>
-        </a:graphic>
-      </p:graphicFrame>
       <p:sp>
         <p:nvSpPr>
           <p:cNvPr id="4" name="Text Placeholder 3">
             <a:extLst>
               <a:ext uri="{FF2B5EF4-FFF2-40B4-BE49-F238E27FC236}">
-                <a16:creationId xmlns:a16="http://schemas.microsoft.com/office/drawing/2014/main" id="{32AAEF80-7B1D-27AF-7A58-6418F0C4049A}"/>
+                <a16:creationId xmlns:a16="http://schemas.microsoft.com/office/drawing/2014/main" id="{97FDDD8A-2907-026E-9427-A99094637217}"/>
               </a:ext>
             </a:extLst>
           </p:cNvPr>
@@ -27367,46 +28531,69 @@
         </p:nvSpPr>
         <p:spPr/>
         <p:txBody>
-          <a:bodyPr>
-            <a:normAutofit fontScale="92500" lnSpcReduction="20000"/>
-          </a:bodyPr>
+          <a:bodyPr/>
           <a:lstStyle/>
           <a:p>
             <a:r>
-              <a:rPr lang="en-GB" sz="2800" dirty="0"/>
-              <a:t>WHAT WAS GIVEN : </a:t>
+              <a:rPr lang="en-GB" dirty="0"/>
+              <a:t>EVIDENCE </a:t>
             </a:r>
-          </a:p>
-          <a:p>
-            <a:r>
-              <a:rPr lang="en-GB" sz="2300" dirty="0"/>
-              <a:t>Write a report about online safety.</a:t>
-            </a:r>
-          </a:p>
-          <a:p>
-            <a:r>
-              <a:rPr lang="en-GB" sz="2300" dirty="0"/>
-              <a:t>Cover passwords, 2FA, phishing, devices, and public Wi-Fi.</a:t>
-            </a:r>
-          </a:p>
-          <a:p>
-            <a:r>
-              <a:rPr lang="en-GB" sz="2300" dirty="0"/>
-              <a:t>Use reliable sources and Harvard references.</a:t>
-            </a:r>
-          </a:p>
-          <a:p>
-            <a:endParaRPr lang="en-GB" sz="2800" dirty="0"/>
-          </a:p>
-          <a:p>
-            <a:endParaRPr lang="en-GB" dirty="0"/>
           </a:p>
         </p:txBody>
       </p:sp>
+      <p:pic>
+        <p:nvPicPr>
+          <p:cNvPr id="1026" name="Picture 2">
+            <a:extLst>
+              <a:ext uri="{FF2B5EF4-FFF2-40B4-BE49-F238E27FC236}">
+                <a16:creationId xmlns:a16="http://schemas.microsoft.com/office/drawing/2014/main" id="{E3852B06-9BA9-F05A-B27E-EE71BD364A75}"/>
+              </a:ext>
+            </a:extLst>
+          </p:cNvPr>
+          <p:cNvPicPr>
+            <a:picLocks noGrp="1" noChangeAspect="1" noChangeArrowheads="1"/>
+          </p:cNvPicPr>
+          <p:nvPr>
+            <p:ph idx="1"/>
+          </p:nvPr>
+        </p:nvPicPr>
+        <p:blipFill>
+          <a:blip r:embed="rId2">
+            <a:extLst>
+              <a:ext uri="{28A0092B-C50C-407E-A947-70E740481C1C}">
+                <a14:useLocalDpi xmlns:a14="http://schemas.microsoft.com/office/drawing/2010/main" val="0"/>
+              </a:ext>
+            </a:extLst>
+          </a:blip>
+          <a:srcRect/>
+          <a:stretch>
+            <a:fillRect/>
+          </a:stretch>
+        </p:blipFill>
+        <p:spPr bwMode="auto">
+          <a:xfrm>
+            <a:off x="6065474" y="1030288"/>
+            <a:ext cx="4337776" cy="5167312"/>
+          </a:xfrm>
+          <a:prstGeom prst="rect">
+            <a:avLst/>
+          </a:prstGeom>
+          <a:noFill/>
+          <a:extLst>
+            <a:ext uri="{909E8E84-426E-40DD-AFC4-6F175D3DCCD1}">
+              <a14:hiddenFill xmlns:a14="http://schemas.microsoft.com/office/drawing/2010/main">
+                <a:solidFill>
+                  <a:srgbClr val="FFFFFF"/>
+                </a:solidFill>
+              </a14:hiddenFill>
+            </a:ext>
+          </a:extLst>
+        </p:spPr>
+      </p:pic>
     </p:spTree>
     <p:extLst>
       <p:ext uri="{BB962C8B-B14F-4D97-AF65-F5344CB8AC3E}">
-        <p14:creationId xmlns:p14="http://schemas.microsoft.com/office/powerpoint/2010/main" val="1398158183"/>
+        <p14:creationId xmlns:p14="http://schemas.microsoft.com/office/powerpoint/2010/main" val="525024259"/>
       </p:ext>
     </p:extLst>
   </p:cSld>
@@ -27438,7 +28625,7 @@
           <p:cNvPr id="2" name="Title 1">
             <a:extLst>
               <a:ext uri="{FF2B5EF4-FFF2-40B4-BE49-F238E27FC236}">
-                <a16:creationId xmlns:a16="http://schemas.microsoft.com/office/drawing/2014/main" id="{0A662AB7-C83C-DC63-CCF5-ECA3B5A5674B}"/>
+                <a16:creationId xmlns:a16="http://schemas.microsoft.com/office/drawing/2014/main" id="{7E842393-5979-E42C-542F-BD9D502BBA5F}"/>
               </a:ext>
             </a:extLst>
           </p:cNvPr>
@@ -27456,46 +28643,92 @@
           <a:p>
             <a:r>
               <a:rPr lang="en-GB" dirty="0"/>
-              <a:t>LIVE DEMO ON GITHUB </a:t>
+              <a:t>MINI PROJECT 2 </a:t>
             </a:r>
           </a:p>
         </p:txBody>
       </p:sp>
-      <p:graphicFrame>
-        <p:nvGraphicFramePr>
-          <p:cNvPr id="7" name="Content Placeholder 2">
+      <p:sp>
+        <p:nvSpPr>
+          <p:cNvPr id="4" name="Text Placeholder 3">
             <a:extLst>
               <a:ext uri="{FF2B5EF4-FFF2-40B4-BE49-F238E27FC236}">
-                <a16:creationId xmlns:a16="http://schemas.microsoft.com/office/drawing/2014/main" id="{EC02A8C8-7383-A191-5BB7-6943A5073285}"/>
+                <a16:creationId xmlns:a16="http://schemas.microsoft.com/office/drawing/2014/main" id="{D2E21B5D-A6D0-C4E0-C93E-9549D36B4033}"/>
               </a:ext>
             </a:extLst>
           </p:cNvPr>
-          <p:cNvGraphicFramePr>
-            <a:graphicFrameLocks noGrp="1"/>
-          </p:cNvGraphicFramePr>
+          <p:cNvSpPr>
+            <a:spLocks noGrp="1"/>
+          </p:cNvSpPr>
+          <p:nvPr>
+            <p:ph type="body" sz="half" idx="2"/>
+          </p:nvPr>
+        </p:nvSpPr>
+        <p:spPr/>
+        <p:txBody>
+          <a:bodyPr/>
+          <a:lstStyle/>
+          <a:p>
+            <a:r>
+              <a:rPr lang="en-GB" dirty="0"/>
+              <a:t>EVIDENCE </a:t>
+            </a:r>
+          </a:p>
+        </p:txBody>
+      </p:sp>
+      <p:pic>
+        <p:nvPicPr>
+          <p:cNvPr id="2050" name="Picture 2">
+            <a:extLst>
+              <a:ext uri="{FF2B5EF4-FFF2-40B4-BE49-F238E27FC236}">
+                <a16:creationId xmlns:a16="http://schemas.microsoft.com/office/drawing/2014/main" id="{35E8E079-4A9E-E2BE-279B-9BDFDBB929B8}"/>
+              </a:ext>
+            </a:extLst>
+          </p:cNvPr>
+          <p:cNvPicPr>
+            <a:picLocks noGrp="1" noChangeAspect="1" noChangeArrowheads="1"/>
+          </p:cNvPicPr>
           <p:nvPr>
             <p:ph idx="1"/>
-            <p:extLst>
-              <p:ext uri="{D42A27DB-BD31-4B8C-83A1-F6EECF244321}">
-                <p14:modId xmlns:p14="http://schemas.microsoft.com/office/powerpoint/2010/main" val="2656110422"/>
-              </p:ext>
-            </p:extLst>
           </p:nvPr>
-        </p:nvGraphicFramePr>
-        <p:xfrm>
-          <a:off x="640080" y="2147455"/>
-          <a:ext cx="10890928" cy="4391890"/>
-        </p:xfrm>
-        <a:graphic>
-          <a:graphicData uri="http://schemas.openxmlformats.org/drawingml/2006/diagram">
-            <dgm:relIds xmlns:dgm="http://schemas.openxmlformats.org/drawingml/2006/diagram" xmlns:r="http://schemas.openxmlformats.org/officeDocument/2006/relationships" r:dm="rId2" r:lo="rId3" r:qs="rId4" r:cs="rId5"/>
-          </a:graphicData>
-        </a:graphic>
-      </p:graphicFrame>
+        </p:nvPicPr>
+        <p:blipFill>
+          <a:blip r:embed="rId2">
+            <a:extLst>
+              <a:ext uri="{28A0092B-C50C-407E-A947-70E740481C1C}">
+                <a14:useLocalDpi xmlns:a14="http://schemas.microsoft.com/office/drawing/2010/main" val="0"/>
+              </a:ext>
+            </a:extLst>
+          </a:blip>
+          <a:srcRect/>
+          <a:stretch>
+            <a:fillRect/>
+          </a:stretch>
+        </p:blipFill>
+        <p:spPr bwMode="auto">
+          <a:xfrm>
+            <a:off x="5388292" y="1266984"/>
+            <a:ext cx="5692140" cy="4693920"/>
+          </a:xfrm>
+          <a:prstGeom prst="rect">
+            <a:avLst/>
+          </a:prstGeom>
+          <a:noFill/>
+          <a:extLst>
+            <a:ext uri="{909E8E84-426E-40DD-AFC4-6F175D3DCCD1}">
+              <a14:hiddenFill xmlns:a14="http://schemas.microsoft.com/office/drawing/2010/main">
+                <a:solidFill>
+                  <a:srgbClr val="FFFFFF"/>
+                </a:solidFill>
+              </a14:hiddenFill>
+            </a:ext>
+          </a:extLst>
+        </p:spPr>
+      </p:pic>
     </p:spTree>
     <p:extLst>
       <p:ext uri="{BB962C8B-B14F-4D97-AF65-F5344CB8AC3E}">
-        <p14:creationId xmlns:p14="http://schemas.microsoft.com/office/powerpoint/2010/main" val="1769892932"/>
+        <p14:creationId xmlns:p14="http://schemas.microsoft.com/office/powerpoint/2010/main" val="426803434"/>
       </p:ext>
     </p:extLst>
   </p:cSld>
@@ -27508,14 +28741,6 @@
 <file path=ppt/slides/slide9.xml><?xml version="1.0" encoding="utf-8"?>
 <p:sld xmlns:a="http://schemas.openxmlformats.org/drawingml/2006/main" xmlns:r="http://schemas.openxmlformats.org/officeDocument/2006/relationships" xmlns:p="http://schemas.openxmlformats.org/presentationml/2006/main">
   <p:cSld>
-    <p:bg>
-      <p:bgPr>
-        <a:solidFill>
-          <a:schemeClr val="bg1"/>
-        </a:solidFill>
-        <a:effectLst/>
-      </p:bgPr>
-    </p:bg>
     <p:spTree>
       <p:nvGrpSpPr>
         <p:cNvPr id="1" name=""/>
@@ -27530,88 +28755,12 @@
           <a:chExt cx="0" cy="0"/>
         </a:xfrm>
       </p:grpSpPr>
-      <p:sp useBgFill="1">
-        <p:nvSpPr>
-          <p:cNvPr id="10" name="Rectangle 9">
-            <a:extLst>
-              <a:ext uri="{FF2B5EF4-FFF2-40B4-BE49-F238E27FC236}">
-                <a16:creationId xmlns:a16="http://schemas.microsoft.com/office/drawing/2014/main" id="{744CAA32-F237-419C-A2DD-43C28D920D3C}"/>
-              </a:ext>
-              <a:ext uri="{C183D7F6-B498-43B3-948B-1728B52AA6E4}">
-                <adec:decorative xmlns:adec="http://schemas.microsoft.com/office/drawing/2017/decorative" val="1"/>
-              </a:ext>
-            </a:extLst>
-          </p:cNvPr>
-          <p:cNvSpPr>
-            <a:spLocks noGrp="1" noRot="1" noChangeAspect="1" noMove="1" noResize="1" noEditPoints="1" noAdjustHandles="1" noChangeArrowheads="1" noChangeShapeType="1" noTextEdit="1"/>
-          </p:cNvSpPr>
-          <p:nvPr>
-            <p:extLst>
-              <p:ext uri="{386F3935-93C4-4BCD-93E2-E3B085C9AB24}">
-                <p16:designElem xmlns:p16="http://schemas.microsoft.com/office/powerpoint/2015/main" val="1"/>
-              </p:ext>
-            </p:extLst>
-          </p:nvPr>
-        </p:nvSpPr>
-        <p:spPr>
-          <a:xfrm>
-            <a:off x="0" y="0"/>
-            <a:ext cx="12192000" cy="6858000"/>
-          </a:xfrm>
-          <a:prstGeom prst="rect">
-            <a:avLst/>
-          </a:prstGeom>
-          <a:ln w="12700" cap="flat" cmpd="sng" algn="ctr">
-            <a:noFill/>
-            <a:prstDash val="solid"/>
-            <a:miter lim="800000"/>
-          </a:ln>
-          <a:effectLst/>
-          <a:extLst>
-            <a:ext uri="{91240B29-F687-4F45-9708-019B960494DF}">
-              <a14:hiddenLine xmlns:a14="http://schemas.microsoft.com/office/drawing/2010/main" w="12700" cap="flat" cmpd="sng" algn="ctr">
-                <a:solidFill>
-                  <a:schemeClr val="accent1">
-                    <a:shade val="50000"/>
-                  </a:schemeClr>
-                </a:solidFill>
-                <a:prstDash val="solid"/>
-                <a:miter lim="800000"/>
-              </a14:hiddenLine>
-            </a:ext>
-          </a:extLst>
-        </p:spPr>
-        <p:style>
-          <a:lnRef idx="2">
-            <a:schemeClr val="accent1">
-              <a:shade val="50000"/>
-            </a:schemeClr>
-          </a:lnRef>
-          <a:fillRef idx="1">
-            <a:schemeClr val="accent1"/>
-          </a:fillRef>
-          <a:effectRef idx="0">
-            <a:schemeClr val="accent1"/>
-          </a:effectRef>
-          <a:fontRef idx="minor">
-            <a:schemeClr val="lt1"/>
-          </a:fontRef>
-        </p:style>
-        <p:txBody>
-          <a:bodyPr rtlCol="0" anchor="ctr"/>
-          <a:lstStyle/>
-          <a:p>
-            <a:pPr algn="ctr"/>
-            <a:endParaRPr lang="en-US"/>
-          </a:p>
-        </p:txBody>
-      </p:sp>
       <p:sp>
         <p:nvSpPr>
           <p:cNvPr id="2" name="Title 1">
             <a:extLst>
               <a:ext uri="{FF2B5EF4-FFF2-40B4-BE49-F238E27FC236}">
-                <a16:creationId xmlns:a16="http://schemas.microsoft.com/office/drawing/2014/main" id="{EB07FF24-C19B-E76B-80D5-6F1E42DEF644}"/>
+                <a16:creationId xmlns:a16="http://schemas.microsoft.com/office/drawing/2014/main" id="{B1C87C4A-941B-DF01-85B0-AB8E4AC029BA}"/>
               </a:ext>
             </a:extLst>
           </p:cNvPr>
@@ -27622,79 +28771,24 @@
             <p:ph type="title"/>
           </p:nvPr>
         </p:nvSpPr>
-        <p:spPr>
-          <a:xfrm>
-            <a:off x="640080" y="1371600"/>
-            <a:ext cx="5737859" cy="1097280"/>
-          </a:xfrm>
-        </p:spPr>
+        <p:spPr/>
         <p:txBody>
-          <a:bodyPr>
-            <a:normAutofit/>
-          </a:bodyPr>
+          <a:bodyPr/>
           <a:lstStyle/>
           <a:p>
             <a:r>
               <a:rPr lang="en-GB" dirty="0"/>
-              <a:t>REFLECTION </a:t>
+              <a:t>MINI PROJECT 2 </a:t>
             </a:r>
           </a:p>
         </p:txBody>
       </p:sp>
-      <p:cxnSp>
-        <p:nvCxnSpPr>
-          <p:cNvPr id="12" name="Straight Connector 11">
-            <a:extLst>
-              <a:ext uri="{FF2B5EF4-FFF2-40B4-BE49-F238E27FC236}">
-                <a16:creationId xmlns:a16="http://schemas.microsoft.com/office/drawing/2014/main" id="{753FE100-D0AB-4AE2-824B-60CFA31EC6A2}"/>
-              </a:ext>
-              <a:ext uri="{C183D7F6-B498-43B3-948B-1728B52AA6E4}">
-                <adec:decorative xmlns:adec="http://schemas.microsoft.com/office/drawing/2017/decorative" val="1"/>
-              </a:ext>
-            </a:extLst>
-          </p:cNvPr>
-          <p:cNvCxnSpPr>
-            <a:cxnSpLocks noGrp="1" noRot="1" noChangeAspect="1" noMove="1" noResize="1" noEditPoints="1" noAdjustHandles="1" noChangeArrowheads="1" noChangeShapeType="1"/>
-          </p:cNvCxnSpPr>
-          <p:nvPr>
-            <p:extLst>
-              <p:ext uri="{386F3935-93C4-4BCD-93E2-E3B085C9AB24}">
-                <p16:designElem xmlns:p16="http://schemas.microsoft.com/office/powerpoint/2015/main" val="1"/>
-              </p:ext>
-            </p:extLst>
-          </p:nvPr>
-        </p:nvCxnSpPr>
-        <p:spPr>
-          <a:xfrm>
-            <a:off x="713232" y="1031001"/>
-            <a:ext cx="978862" cy="0"/>
-          </a:xfrm>
-          <a:prstGeom prst="line">
-            <a:avLst/>
-          </a:prstGeom>
-          <a:ln w="76200"/>
-        </p:spPr>
-        <p:style>
-          <a:lnRef idx="1">
-            <a:schemeClr val="accent1"/>
-          </a:lnRef>
-          <a:fillRef idx="0">
-            <a:schemeClr val="accent1"/>
-          </a:fillRef>
-          <a:effectRef idx="0">
-            <a:schemeClr val="accent1"/>
-          </a:effectRef>
-          <a:fontRef idx="minor">
-            <a:schemeClr val="tx1"/>
-          </a:fontRef>
-        </p:style>
-      </p:cxnSp>
       <p:sp>
         <p:nvSpPr>
           <p:cNvPr id="3" name="Content Placeholder 2">
             <a:extLst>
               <a:ext uri="{FF2B5EF4-FFF2-40B4-BE49-F238E27FC236}">
-                <a16:creationId xmlns:a16="http://schemas.microsoft.com/office/drawing/2014/main" id="{CF0F8E8C-BBE1-78BE-2C3C-473380A93BF2}"/>
+                <a16:creationId xmlns:a16="http://schemas.microsoft.com/office/drawing/2014/main" id="{59A19A6E-D8CC-CB99-A1CE-FF6F93DD89C2}"/>
               </a:ext>
             </a:extLst>
           </p:cNvPr>
@@ -27705,54 +28799,88 @@
             <p:ph idx="1"/>
           </p:nvPr>
         </p:nvSpPr>
-        <p:spPr>
-          <a:xfrm>
-            <a:off x="640080" y="2216727"/>
-            <a:ext cx="7076902" cy="4641273"/>
-          </a:xfrm>
-        </p:spPr>
+        <p:spPr/>
         <p:txBody>
           <a:bodyPr>
-            <a:normAutofit/>
+            <a:normAutofit fontScale="77500" lnSpcReduction="20000"/>
           </a:bodyPr>
           <a:lstStyle/>
           <a:p>
-            <a:pPr marL="0" indent="0">
-              <a:buNone/>
-            </a:pPr>
+            <a:pPr fontAlgn="base"/>
             <a:r>
-              <a:rPr lang="en-GB" sz="3600" b="1" dirty="0"/>
-              <a:t>Learning Journey:</a:t>
+              <a:rPr lang="en-GB" dirty="0"/>
+              <a:t>In testing we have check different test cases and these are:</a:t>
+            </a:r>
+            <a:r>
+              <a:rPr lang="en-US" dirty="0"/>
+              <a:t>​</a:t>
             </a:r>
           </a:p>
           <a:p>
-            <a:pPr marL="0" indent="0">
-              <a:buNone/>
-            </a:pPr>
-            <a:endParaRPr lang="en-GB" sz="3600" b="1" dirty="0"/>
-          </a:p>
-          <a:p>
+            <a:pPr fontAlgn="base"/>
             <a:r>
-              <a:rPr lang="en-GB" sz="2400" dirty="0"/>
-              <a:t>Learned new skills and software.</a:t>
+              <a:rPr lang="en-GB" b="1" dirty="0"/>
+              <a:t>Normal Cases: </a:t>
+            </a:r>
+            <a:r>
+              <a:rPr lang="en-GB" dirty="0"/>
+              <a:t>Tested all the correct input(quantity, sizes, toppings and delivery).</a:t>
+            </a:r>
+            <a:r>
+              <a:rPr lang="en-US" dirty="0"/>
+              <a:t>​</a:t>
             </a:r>
           </a:p>
           <a:p>
+            <a:pPr fontAlgn="base"/>
             <a:r>
-              <a:rPr lang="en-GB" sz="2400" dirty="0"/>
-              <a:t>Faced difficulties but solved them through practice.</a:t>
+              <a:rPr lang="en-GB" b="1" dirty="0"/>
+              <a:t>Boundary Cases: </a:t>
+            </a:r>
+            <a:r>
+              <a:rPr lang="en-GB" dirty="0"/>
+              <a:t>Checked the limits for making sure about the system work. </a:t>
+            </a:r>
+            <a:r>
+              <a:rPr lang="en-US" dirty="0"/>
+              <a:t>​</a:t>
             </a:r>
           </a:p>
           <a:p>
+            <a:pPr fontAlgn="base"/>
             <a:r>
-              <a:rPr lang="en-GB" sz="2400" dirty="0"/>
-              <a:t>Improved my teamwork and problem-solving.</a:t>
+              <a:rPr lang="en-GB" b="1" dirty="0"/>
+              <a:t>Abnormal Cases: </a:t>
+            </a:r>
+            <a:r>
+              <a:rPr lang="en-GB" dirty="0"/>
+              <a:t>Tested all the incorrect input like, (empty spaces, dots instead of correct information).</a:t>
+            </a:r>
+            <a:r>
+              <a:rPr lang="en-US" dirty="0"/>
+              <a:t>​</a:t>
             </a:r>
           </a:p>
           <a:p>
+            <a:pPr fontAlgn="base"/>
             <a:r>
-              <a:rPr lang="en-GB" sz="2400" dirty="0"/>
-              <a:t>Gained more knowledge and confidence.</a:t>
+              <a:rPr lang="en-GB" b="1" dirty="0"/>
+              <a:t>Manually Checking : </a:t>
+            </a:r>
+            <a:r>
+              <a:rPr lang="en-GB" dirty="0"/>
+              <a:t>Tried to do all calculation using paper and calculator for verifying accurate results.</a:t>
+            </a:r>
+            <a:r>
+              <a:rPr lang="en-US" dirty="0"/>
+              <a:t>​</a:t>
+            </a:r>
+          </a:p>
+          <a:p>
+            <a:pPr fontAlgn="base"/>
+            <a:r>
+              <a:rPr lang="en-GB" dirty="0"/>
+              <a:t>​</a:t>
             </a:r>
           </a:p>
           <a:p>
@@ -27760,49 +28888,38 @@
           </a:p>
         </p:txBody>
       </p:sp>
-      <p:pic>
-        <p:nvPicPr>
-          <p:cNvPr id="7" name="Graphic 6" descr="Head with Gears">
+      <p:sp>
+        <p:nvSpPr>
+          <p:cNvPr id="4" name="Text Placeholder 3">
             <a:extLst>
               <a:ext uri="{FF2B5EF4-FFF2-40B4-BE49-F238E27FC236}">
-                <a16:creationId xmlns:a16="http://schemas.microsoft.com/office/drawing/2014/main" id="{2E59A458-82EB-1E27-21E7-E69B0F1D568D}"/>
+                <a16:creationId xmlns:a16="http://schemas.microsoft.com/office/drawing/2014/main" id="{A272DE38-2377-A8AB-F82F-46789652E3F9}"/>
               </a:ext>
             </a:extLst>
           </p:cNvPr>
-          <p:cNvPicPr>
-            <a:picLocks noChangeAspect="1"/>
-          </p:cNvPicPr>
-          <p:nvPr/>
-        </p:nvPicPr>
-        <p:blipFill>
-          <a:blip>
-            <a:extLst>
-              <a:ext uri="{28A0092B-C50C-407E-A947-70E740481C1C}">
-                <a14:useLocalDpi xmlns:a14="http://schemas.microsoft.com/office/drawing/2010/main" val="0"/>
-              </a:ext>
-              <a:ext uri="{96DAC541-7B7A-43D3-8B79-37D633B846F1}">
-                <asvg:svgBlip xmlns:asvg="http://schemas.microsoft.com/office/drawing/2016/SVG/main" r:embed="rId2"/>
-              </a:ext>
-            </a:extLst>
-          </a:blip>
-          <a:stretch>
-            <a:fillRect/>
-          </a:stretch>
-        </p:blipFill>
-        <p:spPr>
-          <a:xfrm>
-            <a:off x="7155179" y="1924386"/>
-            <a:ext cx="4375829" cy="4375829"/>
-          </a:xfrm>
-          <a:prstGeom prst="rect">
-            <a:avLst/>
-          </a:prstGeom>
-        </p:spPr>
-      </p:pic>
+          <p:cNvSpPr>
+            <a:spLocks noGrp="1"/>
+          </p:cNvSpPr>
+          <p:nvPr>
+            <p:ph type="body" sz="half" idx="2"/>
+          </p:nvPr>
+        </p:nvSpPr>
+        <p:spPr/>
+        <p:txBody>
+          <a:bodyPr/>
+          <a:lstStyle/>
+          <a:p>
+            <a:r>
+              <a:rPr lang="en-GB" dirty="0"/>
+              <a:t>EVIDENCE </a:t>
+            </a:r>
+          </a:p>
+        </p:txBody>
+      </p:sp>
     </p:spTree>
     <p:extLst>
       <p:ext uri="{BB962C8B-B14F-4D97-AF65-F5344CB8AC3E}">
-        <p14:creationId xmlns:p14="http://schemas.microsoft.com/office/powerpoint/2010/main" val="922459036"/>
+        <p14:creationId xmlns:p14="http://schemas.microsoft.com/office/powerpoint/2010/main" val="753304717"/>
       </p:ext>
     </p:extLst>
   </p:cSld>
@@ -27810,6 +28927,12 @@
     <a:masterClrMapping/>
   </p:clrMapOvr>
 </p:sld>
+</file>
+
+<file path=ppt/tags/tag1.xml><?xml version="1.0" encoding="utf-8"?>
+<p:tagLst xmlns:a="http://schemas.openxmlformats.org/drawingml/2006/main" xmlns:r="http://schemas.openxmlformats.org/officeDocument/2006/relationships" xmlns:p="http://schemas.openxmlformats.org/presentationml/2006/main">
+  <p:tag name="PRESGUID" val="a4a6061c-227c-40e1-96f4-b256dbd10140"/>
+</p:tagLst>
 </file>
 
 <file path=ppt/theme/theme1.xml><?xml version="1.0" encoding="utf-8"?>

--- a/05_Team_Presentation(Viva)/05_Contribution/TEAM PRESENTION.pptx
+++ b/05_Team_Presentation(Viva)/05_Contribution/TEAM PRESENTION.pptx
@@ -10,23 +10,29 @@
     <p:sldId id="258" r:id="rId4"/>
     <p:sldId id="259" r:id="rId5"/>
     <p:sldId id="266" r:id="rId6"/>
-    <p:sldId id="260" r:id="rId7"/>
-    <p:sldId id="268" r:id="rId8"/>
-    <p:sldId id="269" r:id="rId9"/>
-    <p:sldId id="270" r:id="rId10"/>
-    <p:sldId id="261" r:id="rId11"/>
-    <p:sldId id="267" r:id="rId12"/>
-    <p:sldId id="271" r:id="rId13"/>
-    <p:sldId id="262" r:id="rId14"/>
-    <p:sldId id="272" r:id="rId15"/>
-    <p:sldId id="263" r:id="rId16"/>
-    <p:sldId id="264" r:id="rId17"/>
-    <p:sldId id="265" r:id="rId18"/>
+    <p:sldId id="277" r:id="rId7"/>
+    <p:sldId id="260" r:id="rId8"/>
+    <p:sldId id="273" r:id="rId9"/>
+    <p:sldId id="269" r:id="rId10"/>
+    <p:sldId id="270" r:id="rId11"/>
+    <p:sldId id="268" r:id="rId12"/>
+    <p:sldId id="278" r:id="rId13"/>
+    <p:sldId id="261" r:id="rId14"/>
+    <p:sldId id="271" r:id="rId15"/>
+    <p:sldId id="267" r:id="rId16"/>
+    <p:sldId id="274" r:id="rId17"/>
+    <p:sldId id="275" r:id="rId18"/>
+    <p:sldId id="276" r:id="rId19"/>
+    <p:sldId id="262" r:id="rId20"/>
+    <p:sldId id="272" r:id="rId21"/>
+    <p:sldId id="263" r:id="rId22"/>
+    <p:sldId id="264" r:id="rId23"/>
+    <p:sldId id="265" r:id="rId24"/>
   </p:sldIdLst>
   <p:sldSz cx="12192000" cy="6858000"/>
   <p:notesSz cx="6858000" cy="9144000"/>
   <p:custDataLst>
-    <p:tags r:id="rId19"/>
+    <p:tags r:id="rId25"/>
   </p:custDataLst>
   <p:defaultTextStyle>
     <a:defPPr>
@@ -129,14 +135,6 @@
     </p:ext>
   </p:extLst>
 </p:presentation>
-</file>
-
-<file path=ppt/revisionInfo.xml><?xml version="1.0" encoding="utf-8"?>
-<p1510:revInfo xmlns:a="http://schemas.openxmlformats.org/drawingml/2006/main" xmlns:r="http://schemas.openxmlformats.org/officeDocument/2006/relationships" xmlns:p1510="http://schemas.microsoft.com/office/powerpoint/2015/10/main">
-  <p1510:revLst>
-    <p1510:client id="{B7ACEB7B-5AF9-4D39-89BA-D0E904B890EF}" v="4" dt="2026-10-21T08:27:24.425"/>
-  </p1510:revLst>
-</p1510:revInfo>
 </file>
 
 <file path=ppt/diagrams/colors1.xml><?xml version="1.0" encoding="utf-8"?>
@@ -25884,6 +25882,500 @@
           <p:cNvPr id="2" name="Title 1">
             <a:extLst>
               <a:ext uri="{FF2B5EF4-FFF2-40B4-BE49-F238E27FC236}">
+                <a16:creationId xmlns:a16="http://schemas.microsoft.com/office/drawing/2014/main" id="{B1C87C4A-941B-DF01-85B0-AB8E4AC029BA}"/>
+              </a:ext>
+            </a:extLst>
+          </p:cNvPr>
+          <p:cNvSpPr>
+            <a:spLocks noGrp="1"/>
+          </p:cNvSpPr>
+          <p:nvPr>
+            <p:ph type="title"/>
+          </p:nvPr>
+        </p:nvSpPr>
+        <p:spPr/>
+        <p:txBody>
+          <a:bodyPr/>
+          <a:lstStyle/>
+          <a:p>
+            <a:r>
+              <a:rPr lang="en-GB" dirty="0"/>
+              <a:t>MINI PROJECT 2 </a:t>
+            </a:r>
+          </a:p>
+        </p:txBody>
+      </p:sp>
+      <p:sp>
+        <p:nvSpPr>
+          <p:cNvPr id="3" name="Content Placeholder 2">
+            <a:extLst>
+              <a:ext uri="{FF2B5EF4-FFF2-40B4-BE49-F238E27FC236}">
+                <a16:creationId xmlns:a16="http://schemas.microsoft.com/office/drawing/2014/main" id="{59A19A6E-D8CC-CB99-A1CE-FF6F93DD89C2}"/>
+              </a:ext>
+            </a:extLst>
+          </p:cNvPr>
+          <p:cNvSpPr>
+            <a:spLocks noGrp="1"/>
+          </p:cNvSpPr>
+          <p:nvPr>
+            <p:ph idx="1"/>
+          </p:nvPr>
+        </p:nvSpPr>
+        <p:spPr/>
+        <p:txBody>
+          <a:bodyPr>
+            <a:normAutofit fontScale="77500" lnSpcReduction="20000"/>
+          </a:bodyPr>
+          <a:lstStyle/>
+          <a:p>
+            <a:pPr fontAlgn="base"/>
+            <a:r>
+              <a:rPr lang="en-GB" dirty="0"/>
+              <a:t>In testing we have check different test cases and these are:</a:t>
+            </a:r>
+            <a:r>
+              <a:rPr lang="en-US" dirty="0"/>
+              <a:t>​</a:t>
+            </a:r>
+          </a:p>
+          <a:p>
+            <a:pPr fontAlgn="base"/>
+            <a:r>
+              <a:rPr lang="en-GB" b="1" dirty="0"/>
+              <a:t>Normal Cases: </a:t>
+            </a:r>
+            <a:r>
+              <a:rPr lang="en-GB" dirty="0"/>
+              <a:t>Tested all the correct input(quantity, sizes, toppings and delivery).</a:t>
+            </a:r>
+            <a:r>
+              <a:rPr lang="en-US" dirty="0"/>
+              <a:t>​</a:t>
+            </a:r>
+          </a:p>
+          <a:p>
+            <a:pPr fontAlgn="base"/>
+            <a:r>
+              <a:rPr lang="en-GB" b="1" dirty="0"/>
+              <a:t>Boundary Cases: </a:t>
+            </a:r>
+            <a:r>
+              <a:rPr lang="en-GB" dirty="0"/>
+              <a:t>Checked the limits for making sure about the system work. </a:t>
+            </a:r>
+            <a:r>
+              <a:rPr lang="en-US" dirty="0"/>
+              <a:t>​</a:t>
+            </a:r>
+          </a:p>
+          <a:p>
+            <a:pPr fontAlgn="base"/>
+            <a:r>
+              <a:rPr lang="en-GB" b="1" dirty="0"/>
+              <a:t>Abnormal Cases: </a:t>
+            </a:r>
+            <a:r>
+              <a:rPr lang="en-GB" dirty="0"/>
+              <a:t>Tested all the incorrect input like, (empty spaces, dots instead of correct information).</a:t>
+            </a:r>
+            <a:r>
+              <a:rPr lang="en-US" dirty="0"/>
+              <a:t>​</a:t>
+            </a:r>
+          </a:p>
+          <a:p>
+            <a:pPr fontAlgn="base"/>
+            <a:r>
+              <a:rPr lang="en-GB" b="1" dirty="0"/>
+              <a:t>Manually Checking : </a:t>
+            </a:r>
+            <a:r>
+              <a:rPr lang="en-GB" dirty="0"/>
+              <a:t>Tried to do all calculation using paper and calculator for verifying accurate results.</a:t>
+            </a:r>
+            <a:r>
+              <a:rPr lang="en-US" dirty="0"/>
+              <a:t>​</a:t>
+            </a:r>
+          </a:p>
+          <a:p>
+            <a:pPr fontAlgn="base"/>
+            <a:r>
+              <a:rPr lang="en-GB" dirty="0"/>
+              <a:t>​</a:t>
+            </a:r>
+          </a:p>
+          <a:p>
+            <a:endParaRPr lang="en-GB" dirty="0"/>
+          </a:p>
+        </p:txBody>
+      </p:sp>
+      <p:sp>
+        <p:nvSpPr>
+          <p:cNvPr id="4" name="Text Placeholder 3">
+            <a:extLst>
+              <a:ext uri="{FF2B5EF4-FFF2-40B4-BE49-F238E27FC236}">
+                <a16:creationId xmlns:a16="http://schemas.microsoft.com/office/drawing/2014/main" id="{A272DE38-2377-A8AB-F82F-46789652E3F9}"/>
+              </a:ext>
+            </a:extLst>
+          </p:cNvPr>
+          <p:cNvSpPr>
+            <a:spLocks noGrp="1"/>
+          </p:cNvSpPr>
+          <p:nvPr>
+            <p:ph type="body" sz="half" idx="2"/>
+          </p:nvPr>
+        </p:nvSpPr>
+        <p:spPr/>
+        <p:txBody>
+          <a:bodyPr/>
+          <a:lstStyle/>
+          <a:p>
+            <a:endParaRPr lang="en-GB" dirty="0"/>
+          </a:p>
+        </p:txBody>
+      </p:sp>
+    </p:spTree>
+    <p:extLst>
+      <p:ext uri="{BB962C8B-B14F-4D97-AF65-F5344CB8AC3E}">
+        <p14:creationId xmlns:p14="http://schemas.microsoft.com/office/powerpoint/2010/main" val="753304717"/>
+      </p:ext>
+    </p:extLst>
+  </p:cSld>
+  <p:clrMapOvr>
+    <a:masterClrMapping/>
+  </p:clrMapOvr>
+</p:sld>
+</file>
+
+<file path=ppt/slides/slide11.xml><?xml version="1.0" encoding="utf-8"?>
+<p:sld xmlns:a="http://schemas.openxmlformats.org/drawingml/2006/main" xmlns:r="http://schemas.openxmlformats.org/officeDocument/2006/relationships" xmlns:p="http://schemas.openxmlformats.org/presentationml/2006/main">
+  <p:cSld>
+    <p:spTree>
+      <p:nvGrpSpPr>
+        <p:cNvPr id="1" name=""/>
+        <p:cNvGrpSpPr/>
+        <p:nvPr/>
+      </p:nvGrpSpPr>
+      <p:grpSpPr>
+        <a:xfrm>
+          <a:off x="0" y="0"/>
+          <a:ext cx="0" cy="0"/>
+          <a:chOff x="0" y="0"/>
+          <a:chExt cx="0" cy="0"/>
+        </a:xfrm>
+      </p:grpSpPr>
+      <p:sp>
+        <p:nvSpPr>
+          <p:cNvPr id="2" name="Title 1">
+            <a:extLst>
+              <a:ext uri="{FF2B5EF4-FFF2-40B4-BE49-F238E27FC236}">
+                <a16:creationId xmlns:a16="http://schemas.microsoft.com/office/drawing/2014/main" id="{B8926833-7D5E-2173-1364-D5EA126C6694}"/>
+              </a:ext>
+            </a:extLst>
+          </p:cNvPr>
+          <p:cNvSpPr>
+            <a:spLocks noGrp="1"/>
+          </p:cNvSpPr>
+          <p:nvPr>
+            <p:ph type="title"/>
+          </p:nvPr>
+        </p:nvSpPr>
+        <p:spPr/>
+        <p:txBody>
+          <a:bodyPr/>
+          <a:lstStyle/>
+          <a:p>
+            <a:r>
+              <a:rPr lang="en-GB" dirty="0"/>
+              <a:t>MINI PROJECT 2 </a:t>
+            </a:r>
+          </a:p>
+        </p:txBody>
+      </p:sp>
+      <p:sp>
+        <p:nvSpPr>
+          <p:cNvPr id="4" name="Text Placeholder 3">
+            <a:extLst>
+              <a:ext uri="{FF2B5EF4-FFF2-40B4-BE49-F238E27FC236}">
+                <a16:creationId xmlns:a16="http://schemas.microsoft.com/office/drawing/2014/main" id="{97FDDD8A-2907-026E-9427-A99094637217}"/>
+              </a:ext>
+            </a:extLst>
+          </p:cNvPr>
+          <p:cNvSpPr>
+            <a:spLocks noGrp="1"/>
+          </p:cNvSpPr>
+          <p:nvPr>
+            <p:ph type="body" sz="half" idx="2"/>
+          </p:nvPr>
+        </p:nvSpPr>
+        <p:spPr/>
+        <p:txBody>
+          <a:bodyPr/>
+          <a:lstStyle/>
+          <a:p>
+            <a:r>
+              <a:rPr lang="en-GB" dirty="0"/>
+              <a:t>EVIDENCE </a:t>
+            </a:r>
+          </a:p>
+        </p:txBody>
+      </p:sp>
+      <p:pic>
+        <p:nvPicPr>
+          <p:cNvPr id="1026" name="Picture 2">
+            <a:extLst>
+              <a:ext uri="{FF2B5EF4-FFF2-40B4-BE49-F238E27FC236}">
+                <a16:creationId xmlns:a16="http://schemas.microsoft.com/office/drawing/2014/main" id="{E3852B06-9BA9-F05A-B27E-EE71BD364A75}"/>
+              </a:ext>
+            </a:extLst>
+          </p:cNvPr>
+          <p:cNvPicPr>
+            <a:picLocks noGrp="1" noChangeAspect="1" noChangeArrowheads="1"/>
+          </p:cNvPicPr>
+          <p:nvPr>
+            <p:ph idx="1"/>
+          </p:nvPr>
+        </p:nvPicPr>
+        <p:blipFill>
+          <a:blip r:embed="rId2">
+            <a:extLst>
+              <a:ext uri="{28A0092B-C50C-407E-A947-70E740481C1C}">
+                <a14:useLocalDpi xmlns:a14="http://schemas.microsoft.com/office/drawing/2010/main" val="0"/>
+              </a:ext>
+            </a:extLst>
+          </a:blip>
+          <a:srcRect/>
+          <a:stretch>
+            <a:fillRect/>
+          </a:stretch>
+        </p:blipFill>
+        <p:spPr bwMode="auto">
+          <a:xfrm>
+            <a:off x="6065474" y="1030288"/>
+            <a:ext cx="4337776" cy="5167312"/>
+          </a:xfrm>
+          <a:prstGeom prst="rect">
+            <a:avLst/>
+          </a:prstGeom>
+          <a:noFill/>
+          <a:extLst>
+            <a:ext uri="{909E8E84-426E-40DD-AFC4-6F175D3DCCD1}">
+              <a14:hiddenFill xmlns:a14="http://schemas.microsoft.com/office/drawing/2010/main">
+                <a:solidFill>
+                  <a:srgbClr val="FFFFFF"/>
+                </a:solidFill>
+              </a14:hiddenFill>
+            </a:ext>
+          </a:extLst>
+        </p:spPr>
+      </p:pic>
+    </p:spTree>
+    <p:extLst>
+      <p:ext uri="{BB962C8B-B14F-4D97-AF65-F5344CB8AC3E}">
+        <p14:creationId xmlns:p14="http://schemas.microsoft.com/office/powerpoint/2010/main" val="525024259"/>
+      </p:ext>
+    </p:extLst>
+  </p:cSld>
+  <p:clrMapOvr>
+    <a:masterClrMapping/>
+  </p:clrMapOvr>
+</p:sld>
+</file>
+
+<file path=ppt/slides/slide12.xml><?xml version="1.0" encoding="utf-8"?>
+<p:sld xmlns:a="http://schemas.openxmlformats.org/drawingml/2006/main" xmlns:r="http://schemas.openxmlformats.org/officeDocument/2006/relationships" xmlns:p="http://schemas.openxmlformats.org/presentationml/2006/main">
+  <p:cSld>
+    <p:spTree>
+      <p:nvGrpSpPr>
+        <p:cNvPr id="1" name=""/>
+        <p:cNvGrpSpPr/>
+        <p:nvPr/>
+      </p:nvGrpSpPr>
+      <p:grpSpPr>
+        <a:xfrm>
+          <a:off x="0" y="0"/>
+          <a:ext cx="0" cy="0"/>
+          <a:chOff x="0" y="0"/>
+          <a:chExt cx="0" cy="0"/>
+        </a:xfrm>
+      </p:grpSpPr>
+      <p:pic>
+        <p:nvPicPr>
+          <p:cNvPr id="3074" name="Picture 2">
+            <a:extLst>
+              <a:ext uri="{FF2B5EF4-FFF2-40B4-BE49-F238E27FC236}">
+                <a16:creationId xmlns:a16="http://schemas.microsoft.com/office/drawing/2014/main" id="{2EDE192D-92E6-9A7C-999A-35E7EE875DF8}"/>
+              </a:ext>
+            </a:extLst>
+          </p:cNvPr>
+          <p:cNvPicPr>
+            <a:picLocks noChangeAspect="1" noChangeArrowheads="1"/>
+          </p:cNvPicPr>
+          <p:nvPr/>
+        </p:nvPicPr>
+        <p:blipFill>
+          <a:blip r:embed="rId2">
+            <a:extLst>
+              <a:ext uri="{28A0092B-C50C-407E-A947-70E740481C1C}">
+                <a14:useLocalDpi xmlns:a14="http://schemas.microsoft.com/office/drawing/2010/main" val="0"/>
+              </a:ext>
+            </a:extLst>
+          </a:blip>
+          <a:srcRect/>
+          <a:stretch>
+            <a:fillRect/>
+          </a:stretch>
+        </p:blipFill>
+        <p:spPr bwMode="auto">
+          <a:xfrm>
+            <a:off x="374650" y="222250"/>
+            <a:ext cx="4654550" cy="3810000"/>
+          </a:xfrm>
+          <a:prstGeom prst="rect">
+            <a:avLst/>
+          </a:prstGeom>
+          <a:noFill/>
+          <a:extLst>
+            <a:ext uri="{909E8E84-426E-40DD-AFC4-6F175D3DCCD1}">
+              <a14:hiddenFill xmlns:a14="http://schemas.microsoft.com/office/drawing/2010/main">
+                <a:solidFill>
+                  <a:srgbClr val="FFFFFF"/>
+                </a:solidFill>
+              </a14:hiddenFill>
+            </a:ext>
+          </a:extLst>
+        </p:spPr>
+      </p:pic>
+      <p:pic>
+        <p:nvPicPr>
+          <p:cNvPr id="3076" name="Picture 4">
+            <a:extLst>
+              <a:ext uri="{FF2B5EF4-FFF2-40B4-BE49-F238E27FC236}">
+                <a16:creationId xmlns:a16="http://schemas.microsoft.com/office/drawing/2014/main" id="{A531C179-124F-46BC-9593-0551EE62C377}"/>
+              </a:ext>
+            </a:extLst>
+          </p:cNvPr>
+          <p:cNvPicPr>
+            <a:picLocks noChangeAspect="1" noChangeArrowheads="1"/>
+          </p:cNvPicPr>
+          <p:nvPr/>
+        </p:nvPicPr>
+        <p:blipFill>
+          <a:blip r:embed="rId3">
+            <a:extLst>
+              <a:ext uri="{28A0092B-C50C-407E-A947-70E740481C1C}">
+                <a14:useLocalDpi xmlns:a14="http://schemas.microsoft.com/office/drawing/2010/main" val="0"/>
+              </a:ext>
+            </a:extLst>
+          </a:blip>
+          <a:srcRect/>
+          <a:stretch>
+            <a:fillRect/>
+          </a:stretch>
+        </p:blipFill>
+        <p:spPr bwMode="auto">
+          <a:xfrm>
+            <a:off x="374651" y="4159250"/>
+            <a:ext cx="4654549" cy="2393950"/>
+          </a:xfrm>
+          <a:prstGeom prst="rect">
+            <a:avLst/>
+          </a:prstGeom>
+          <a:noFill/>
+          <a:extLst>
+            <a:ext uri="{909E8E84-426E-40DD-AFC4-6F175D3DCCD1}">
+              <a14:hiddenFill xmlns:a14="http://schemas.microsoft.com/office/drawing/2010/main">
+                <a:solidFill>
+                  <a:srgbClr val="FFFFFF"/>
+                </a:solidFill>
+              </a14:hiddenFill>
+            </a:ext>
+          </a:extLst>
+        </p:spPr>
+      </p:pic>
+      <p:pic>
+        <p:nvPicPr>
+          <p:cNvPr id="3078" name="Picture 6">
+            <a:extLst>
+              <a:ext uri="{FF2B5EF4-FFF2-40B4-BE49-F238E27FC236}">
+                <a16:creationId xmlns:a16="http://schemas.microsoft.com/office/drawing/2014/main" id="{54C7D8D2-3F39-08FF-341E-B2D987871794}"/>
+              </a:ext>
+            </a:extLst>
+          </p:cNvPr>
+          <p:cNvPicPr>
+            <a:picLocks noChangeAspect="1" noChangeArrowheads="1"/>
+          </p:cNvPicPr>
+          <p:nvPr/>
+        </p:nvPicPr>
+        <p:blipFill>
+          <a:blip r:embed="rId4">
+            <a:extLst>
+              <a:ext uri="{28A0092B-C50C-407E-A947-70E740481C1C}">
+                <a14:useLocalDpi xmlns:a14="http://schemas.microsoft.com/office/drawing/2010/main" val="0"/>
+              </a:ext>
+            </a:extLst>
+          </a:blip>
+          <a:srcRect/>
+          <a:stretch>
+            <a:fillRect/>
+          </a:stretch>
+        </p:blipFill>
+        <p:spPr bwMode="auto">
+          <a:xfrm>
+            <a:off x="5029200" y="619125"/>
+            <a:ext cx="7162800" cy="5619750"/>
+          </a:xfrm>
+          <a:prstGeom prst="rect">
+            <a:avLst/>
+          </a:prstGeom>
+          <a:noFill/>
+          <a:extLst>
+            <a:ext uri="{909E8E84-426E-40DD-AFC4-6F175D3DCCD1}">
+              <a14:hiddenFill xmlns:a14="http://schemas.microsoft.com/office/drawing/2010/main">
+                <a:solidFill>
+                  <a:srgbClr val="FFFFFF"/>
+                </a:solidFill>
+              </a14:hiddenFill>
+            </a:ext>
+          </a:extLst>
+        </p:spPr>
+      </p:pic>
+    </p:spTree>
+    <p:extLst>
+      <p:ext uri="{BB962C8B-B14F-4D97-AF65-F5344CB8AC3E}">
+        <p14:creationId xmlns:p14="http://schemas.microsoft.com/office/powerpoint/2010/main" val="401450924"/>
+      </p:ext>
+    </p:extLst>
+  </p:cSld>
+  <p:clrMapOvr>
+    <a:masterClrMapping/>
+  </p:clrMapOvr>
+</p:sld>
+</file>
+
+<file path=ppt/slides/slide13.xml><?xml version="1.0" encoding="utf-8"?>
+<p:sld xmlns:a="http://schemas.openxmlformats.org/drawingml/2006/main" xmlns:r="http://schemas.openxmlformats.org/officeDocument/2006/relationships" xmlns:p="http://schemas.openxmlformats.org/presentationml/2006/main">
+  <p:cSld>
+    <p:spTree>
+      <p:nvGrpSpPr>
+        <p:cNvPr id="1" name=""/>
+        <p:cNvGrpSpPr/>
+        <p:nvPr/>
+      </p:nvGrpSpPr>
+      <p:grpSpPr>
+        <a:xfrm>
+          <a:off x="0" y="0"/>
+          <a:ext cx="0" cy="0"/>
+          <a:chOff x="0" y="0"/>
+          <a:chExt cx="0" cy="0"/>
+        </a:xfrm>
+      </p:grpSpPr>
+      <p:sp>
+        <p:nvSpPr>
+          <p:cNvPr id="2" name="Title 1">
+            <a:extLst>
+              <a:ext uri="{FF2B5EF4-FFF2-40B4-BE49-F238E27FC236}">
                 <a16:creationId xmlns:a16="http://schemas.microsoft.com/office/drawing/2014/main" id="{63A3D83C-BEA6-9BB9-A3F4-BD9D97CC49A9}"/>
               </a:ext>
             </a:extLst>
@@ -25996,7 +26488,131 @@
 </p:sld>
 </file>
 
-<file path=ppt/slides/slide11.xml><?xml version="1.0" encoding="utf-8"?>
+<file path=ppt/slides/slide14.xml><?xml version="1.0" encoding="utf-8"?>
+<p:sld xmlns:a="http://schemas.openxmlformats.org/drawingml/2006/main" xmlns:r="http://schemas.openxmlformats.org/officeDocument/2006/relationships" xmlns:p="http://schemas.openxmlformats.org/presentationml/2006/main">
+  <p:cSld>
+    <p:spTree>
+      <p:nvGrpSpPr>
+        <p:cNvPr id="1" name=""/>
+        <p:cNvGrpSpPr/>
+        <p:nvPr/>
+      </p:nvGrpSpPr>
+      <p:grpSpPr>
+        <a:xfrm>
+          <a:off x="0" y="0"/>
+          <a:ext cx="0" cy="0"/>
+          <a:chOff x="0" y="0"/>
+          <a:chExt cx="0" cy="0"/>
+        </a:xfrm>
+      </p:grpSpPr>
+      <p:sp>
+        <p:nvSpPr>
+          <p:cNvPr id="2" name="Title 1">
+            <a:extLst>
+              <a:ext uri="{FF2B5EF4-FFF2-40B4-BE49-F238E27FC236}">
+                <a16:creationId xmlns:a16="http://schemas.microsoft.com/office/drawing/2014/main" id="{193BB18F-59B1-6556-90FC-F1510A933F46}"/>
+              </a:ext>
+            </a:extLst>
+          </p:cNvPr>
+          <p:cNvSpPr>
+            <a:spLocks noGrp="1"/>
+          </p:cNvSpPr>
+          <p:nvPr>
+            <p:ph type="title"/>
+          </p:nvPr>
+        </p:nvSpPr>
+        <p:spPr/>
+        <p:txBody>
+          <a:bodyPr/>
+          <a:lstStyle/>
+          <a:p>
+            <a:r>
+              <a:rPr lang="en-GB" dirty="0"/>
+              <a:t>MINI PROJECT 3 </a:t>
+            </a:r>
+          </a:p>
+        </p:txBody>
+      </p:sp>
+      <p:pic>
+        <p:nvPicPr>
+          <p:cNvPr id="6" name="Content Placeholder 5">
+            <a:extLst>
+              <a:ext uri="{FF2B5EF4-FFF2-40B4-BE49-F238E27FC236}">
+                <a16:creationId xmlns:a16="http://schemas.microsoft.com/office/drawing/2014/main" id="{8804A351-101C-6C7C-23DF-DAD3F52E4587}"/>
+              </a:ext>
+            </a:extLst>
+          </p:cNvPr>
+          <p:cNvPicPr>
+            <a:picLocks noGrp="1" noChangeAspect="1"/>
+          </p:cNvPicPr>
+          <p:nvPr>
+            <p:ph idx="1"/>
+          </p:nvPr>
+        </p:nvPicPr>
+        <p:blipFill>
+          <a:blip r:embed="rId2">
+            <a:extLst>
+              <a:ext uri="{28A0092B-C50C-407E-A947-70E740481C1C}">
+                <a14:useLocalDpi xmlns:a14="http://schemas.microsoft.com/office/drawing/2010/main" val="0"/>
+              </a:ext>
+            </a:extLst>
+          </a:blip>
+          <a:stretch>
+            <a:fillRect/>
+          </a:stretch>
+        </p:blipFill>
+        <p:spPr>
+          <a:xfrm>
+            <a:off x="6095948" y="1030288"/>
+            <a:ext cx="4276829" cy="5167312"/>
+          </a:xfrm>
+          <a:prstGeom prst="rect">
+            <a:avLst/>
+          </a:prstGeom>
+        </p:spPr>
+      </p:pic>
+      <p:sp>
+        <p:nvSpPr>
+          <p:cNvPr id="4" name="Text Placeholder 3">
+            <a:extLst>
+              <a:ext uri="{FF2B5EF4-FFF2-40B4-BE49-F238E27FC236}">
+                <a16:creationId xmlns:a16="http://schemas.microsoft.com/office/drawing/2014/main" id="{86DB7B03-0FC3-5E67-A223-325255C122C5}"/>
+              </a:ext>
+            </a:extLst>
+          </p:cNvPr>
+          <p:cNvSpPr>
+            <a:spLocks noGrp="1"/>
+          </p:cNvSpPr>
+          <p:nvPr>
+            <p:ph type="body" sz="half" idx="2"/>
+          </p:nvPr>
+        </p:nvSpPr>
+        <p:spPr/>
+        <p:txBody>
+          <a:bodyPr/>
+          <a:lstStyle/>
+          <a:p>
+            <a:r>
+              <a:rPr lang="en-GB" dirty="0"/>
+              <a:t>EVIDENCE </a:t>
+            </a:r>
+          </a:p>
+        </p:txBody>
+      </p:sp>
+    </p:spTree>
+    <p:extLst>
+      <p:ext uri="{BB962C8B-B14F-4D97-AF65-F5344CB8AC3E}">
+        <p14:creationId xmlns:p14="http://schemas.microsoft.com/office/powerpoint/2010/main" val="2396907301"/>
+      </p:ext>
+    </p:extLst>
+  </p:cSld>
+  <p:clrMapOvr>
+    <a:masterClrMapping/>
+  </p:clrMapOvr>
+</p:sld>
+</file>
+
+<file path=ppt/slides/slide15.xml><?xml version="1.0" encoding="utf-8"?>
 <p:sld xmlns:a="http://schemas.openxmlformats.org/drawingml/2006/main" xmlns:r="http://schemas.openxmlformats.org/officeDocument/2006/relationships" xmlns:p="http://schemas.openxmlformats.org/presentationml/2006/main">
   <p:cSld>
     <p:spTree>
@@ -26156,7 +26772,7 @@
 </p:sld>
 </file>
 
-<file path=ppt/slides/slide12.xml><?xml version="1.0" encoding="utf-8"?>
+<file path=ppt/slides/slide16.xml><?xml version="1.0" encoding="utf-8"?>
 <p:sld xmlns:a="http://schemas.openxmlformats.org/drawingml/2006/main" xmlns:r="http://schemas.openxmlformats.org/officeDocument/2006/relationships" xmlns:p="http://schemas.openxmlformats.org/presentationml/2006/main">
   <p:cSld>
     <p:spTree>
@@ -26173,49 +26789,19 @@
           <a:chExt cx="0" cy="0"/>
         </a:xfrm>
       </p:grpSpPr>
-      <p:sp>
-        <p:nvSpPr>
-          <p:cNvPr id="2" name="Title 1">
+      <p:pic>
+        <p:nvPicPr>
+          <p:cNvPr id="3" name="Picture 2">
             <a:extLst>
               <a:ext uri="{FF2B5EF4-FFF2-40B4-BE49-F238E27FC236}">
-                <a16:creationId xmlns:a16="http://schemas.microsoft.com/office/drawing/2014/main" id="{193BB18F-59B1-6556-90FC-F1510A933F46}"/>
-              </a:ext>
-            </a:extLst>
-          </p:cNvPr>
-          <p:cNvSpPr>
-            <a:spLocks noGrp="1"/>
-          </p:cNvSpPr>
-          <p:nvPr>
-            <p:ph type="title"/>
-          </p:nvPr>
-        </p:nvSpPr>
-        <p:spPr/>
-        <p:txBody>
-          <a:bodyPr/>
-          <a:lstStyle/>
-          <a:p>
-            <a:r>
-              <a:rPr lang="en-GB" dirty="0"/>
-              <a:t>MINI PROJECT 3 </a:t>
-            </a:r>
-          </a:p>
-        </p:txBody>
-      </p:sp>
-      <p:pic>
-        <p:nvPicPr>
-          <p:cNvPr id="6" name="Content Placeholder 5">
-            <a:extLst>
-              <a:ext uri="{FF2B5EF4-FFF2-40B4-BE49-F238E27FC236}">
-                <a16:creationId xmlns:a16="http://schemas.microsoft.com/office/drawing/2014/main" id="{8804A351-101C-6C7C-23DF-DAD3F52E4587}"/>
+                <a16:creationId xmlns:a16="http://schemas.microsoft.com/office/drawing/2014/main" id="{5ADFD0FA-7B99-16FC-7E7C-6A750BD50CB1}"/>
               </a:ext>
             </a:extLst>
           </p:cNvPr>
           <p:cNvPicPr>
-            <a:picLocks noGrp="1" noChangeAspect="1"/>
+            <a:picLocks noChangeAspect="1"/>
           </p:cNvPicPr>
-          <p:nvPr>
-            <p:ph idx="1"/>
-          </p:nvPr>
+          <p:nvPr/>
         </p:nvPicPr>
         <p:blipFill>
           <a:blip r:embed="rId2">
@@ -26231,46 +26817,18 @@
         </p:blipFill>
         <p:spPr>
           <a:xfrm>
-            <a:off x="6095948" y="1030288"/>
-            <a:ext cx="4276829" cy="5167312"/>
+            <a:off x="2595074" y="850900"/>
+            <a:ext cx="5526576" cy="4597400"/>
           </a:xfrm>
           <a:prstGeom prst="rect">
             <a:avLst/>
           </a:prstGeom>
         </p:spPr>
       </p:pic>
-      <p:sp>
-        <p:nvSpPr>
-          <p:cNvPr id="4" name="Text Placeholder 3">
-            <a:extLst>
-              <a:ext uri="{FF2B5EF4-FFF2-40B4-BE49-F238E27FC236}">
-                <a16:creationId xmlns:a16="http://schemas.microsoft.com/office/drawing/2014/main" id="{86DB7B03-0FC3-5E67-A223-325255C122C5}"/>
-              </a:ext>
-            </a:extLst>
-          </p:cNvPr>
-          <p:cNvSpPr>
-            <a:spLocks noGrp="1"/>
-          </p:cNvSpPr>
-          <p:nvPr>
-            <p:ph type="body" sz="half" idx="2"/>
-          </p:nvPr>
-        </p:nvSpPr>
-        <p:spPr/>
-        <p:txBody>
-          <a:bodyPr/>
-          <a:lstStyle/>
-          <a:p>
-            <a:r>
-              <a:rPr lang="en-GB" dirty="0"/>
-              <a:t>EVIDENCE </a:t>
-            </a:r>
-          </a:p>
-        </p:txBody>
-      </p:sp>
     </p:spTree>
     <p:extLst>
       <p:ext uri="{BB962C8B-B14F-4D97-AF65-F5344CB8AC3E}">
-        <p14:creationId xmlns:p14="http://schemas.microsoft.com/office/powerpoint/2010/main" val="2396907301"/>
+        <p14:creationId xmlns:p14="http://schemas.microsoft.com/office/powerpoint/2010/main" val="2452207997"/>
       </p:ext>
     </p:extLst>
   </p:cSld>
@@ -26280,7 +26838,175 @@
 </p:sld>
 </file>
 
-<file path=ppt/slides/slide13.xml><?xml version="1.0" encoding="utf-8"?>
+<file path=ppt/slides/slide17.xml><?xml version="1.0" encoding="utf-8"?>
+<p:sld xmlns:a="http://schemas.openxmlformats.org/drawingml/2006/main" xmlns:r="http://schemas.openxmlformats.org/officeDocument/2006/relationships" xmlns:p="http://schemas.openxmlformats.org/presentationml/2006/main">
+  <p:cSld>
+    <p:spTree>
+      <p:nvGrpSpPr>
+        <p:cNvPr id="1" name=""/>
+        <p:cNvGrpSpPr/>
+        <p:nvPr/>
+      </p:nvGrpSpPr>
+      <p:grpSpPr>
+        <a:xfrm>
+          <a:off x="0" y="0"/>
+          <a:ext cx="0" cy="0"/>
+          <a:chOff x="0" y="0"/>
+          <a:chExt cx="0" cy="0"/>
+        </a:xfrm>
+      </p:grpSpPr>
+      <p:pic>
+        <p:nvPicPr>
+          <p:cNvPr id="3" name="Picture 2">
+            <a:extLst>
+              <a:ext uri="{FF2B5EF4-FFF2-40B4-BE49-F238E27FC236}">
+                <a16:creationId xmlns:a16="http://schemas.microsoft.com/office/drawing/2014/main" id="{A8405B4B-D371-697E-C683-7E700E1A7AC4}"/>
+              </a:ext>
+            </a:extLst>
+          </p:cNvPr>
+          <p:cNvPicPr>
+            <a:picLocks noChangeAspect="1"/>
+          </p:cNvPicPr>
+          <p:nvPr/>
+        </p:nvPicPr>
+        <p:blipFill>
+          <a:blip r:embed="rId2">
+            <a:extLst>
+              <a:ext uri="{28A0092B-C50C-407E-A947-70E740481C1C}">
+                <a14:useLocalDpi xmlns:a14="http://schemas.microsoft.com/office/drawing/2010/main" val="0"/>
+              </a:ext>
+            </a:extLst>
+          </a:blip>
+          <a:stretch>
+            <a:fillRect/>
+          </a:stretch>
+        </p:blipFill>
+        <p:spPr>
+          <a:xfrm>
+            <a:off x="969349" y="88900"/>
+            <a:ext cx="3583601" cy="6038850"/>
+          </a:xfrm>
+          <a:prstGeom prst="rect">
+            <a:avLst/>
+          </a:prstGeom>
+        </p:spPr>
+      </p:pic>
+      <p:pic>
+        <p:nvPicPr>
+          <p:cNvPr id="5" name="Picture 4">
+            <a:extLst>
+              <a:ext uri="{FF2B5EF4-FFF2-40B4-BE49-F238E27FC236}">
+                <a16:creationId xmlns:a16="http://schemas.microsoft.com/office/drawing/2014/main" id="{BF126DAC-FF22-EC94-53F7-30A04B584CC0}"/>
+              </a:ext>
+            </a:extLst>
+          </p:cNvPr>
+          <p:cNvPicPr>
+            <a:picLocks noChangeAspect="1"/>
+          </p:cNvPicPr>
+          <p:nvPr/>
+        </p:nvPicPr>
+        <p:blipFill>
+          <a:blip r:embed="rId3">
+            <a:extLst>
+              <a:ext uri="{28A0092B-C50C-407E-A947-70E740481C1C}">
+                <a14:useLocalDpi xmlns:a14="http://schemas.microsoft.com/office/drawing/2010/main" val="0"/>
+              </a:ext>
+            </a:extLst>
+          </a:blip>
+          <a:stretch>
+            <a:fillRect/>
+          </a:stretch>
+        </p:blipFill>
+        <p:spPr>
+          <a:xfrm>
+            <a:off x="4845050" y="0"/>
+            <a:ext cx="5753100" cy="6515100"/>
+          </a:xfrm>
+          <a:prstGeom prst="rect">
+            <a:avLst/>
+          </a:prstGeom>
+        </p:spPr>
+      </p:pic>
+    </p:spTree>
+    <p:extLst>
+      <p:ext uri="{BB962C8B-B14F-4D97-AF65-F5344CB8AC3E}">
+        <p14:creationId xmlns:p14="http://schemas.microsoft.com/office/powerpoint/2010/main" val="3302102917"/>
+      </p:ext>
+    </p:extLst>
+  </p:cSld>
+  <p:clrMapOvr>
+    <a:masterClrMapping/>
+  </p:clrMapOvr>
+</p:sld>
+</file>
+
+<file path=ppt/slides/slide18.xml><?xml version="1.0" encoding="utf-8"?>
+<p:sld xmlns:a="http://schemas.openxmlformats.org/drawingml/2006/main" xmlns:r="http://schemas.openxmlformats.org/officeDocument/2006/relationships" xmlns:p="http://schemas.openxmlformats.org/presentationml/2006/main">
+  <p:cSld>
+    <p:spTree>
+      <p:nvGrpSpPr>
+        <p:cNvPr id="1" name=""/>
+        <p:cNvGrpSpPr/>
+        <p:nvPr/>
+      </p:nvGrpSpPr>
+      <p:grpSpPr>
+        <a:xfrm>
+          <a:off x="0" y="0"/>
+          <a:ext cx="0" cy="0"/>
+          <a:chOff x="0" y="0"/>
+          <a:chExt cx="0" cy="0"/>
+        </a:xfrm>
+      </p:grpSpPr>
+      <p:pic>
+        <p:nvPicPr>
+          <p:cNvPr id="3" name="Picture 2">
+            <a:extLst>
+              <a:ext uri="{FF2B5EF4-FFF2-40B4-BE49-F238E27FC236}">
+                <a16:creationId xmlns:a16="http://schemas.microsoft.com/office/drawing/2014/main" id="{55B2864D-AF6C-E593-67AE-F8C73D5E45EC}"/>
+              </a:ext>
+            </a:extLst>
+          </p:cNvPr>
+          <p:cNvPicPr>
+            <a:picLocks noChangeAspect="1"/>
+          </p:cNvPicPr>
+          <p:nvPr/>
+        </p:nvPicPr>
+        <p:blipFill>
+          <a:blip r:embed="rId2">
+            <a:extLst>
+              <a:ext uri="{28A0092B-C50C-407E-A947-70E740481C1C}">
+                <a14:useLocalDpi xmlns:a14="http://schemas.microsoft.com/office/drawing/2010/main" val="0"/>
+              </a:ext>
+            </a:extLst>
+          </a:blip>
+          <a:stretch>
+            <a:fillRect/>
+          </a:stretch>
+        </p:blipFill>
+        <p:spPr>
+          <a:xfrm>
+            <a:off x="3440425" y="0"/>
+            <a:ext cx="5311150" cy="6858000"/>
+          </a:xfrm>
+          <a:prstGeom prst="rect">
+            <a:avLst/>
+          </a:prstGeom>
+        </p:spPr>
+      </p:pic>
+    </p:spTree>
+    <p:extLst>
+      <p:ext uri="{BB962C8B-B14F-4D97-AF65-F5344CB8AC3E}">
+        <p14:creationId xmlns:p14="http://schemas.microsoft.com/office/powerpoint/2010/main" val="3440339168"/>
+      </p:ext>
+    </p:extLst>
+  </p:cSld>
+  <p:clrMapOvr>
+    <a:masterClrMapping/>
+  </p:clrMapOvr>
+</p:sld>
+</file>
+
+<file path=ppt/slides/slide19.xml><?xml version="1.0" encoding="utf-8"?>
 <p:sld xmlns:a="http://schemas.openxmlformats.org/drawingml/2006/main" xmlns:r="http://schemas.openxmlformats.org/officeDocument/2006/relationships" xmlns:p="http://schemas.openxmlformats.org/presentationml/2006/main">
   <p:cSld>
     <p:spTree>
@@ -26423,7 +27149,280 @@
 </p:sld>
 </file>
 
-<file path=ppt/slides/slide14.xml><?xml version="1.0" encoding="utf-8"?>
+<file path=ppt/slides/slide2.xml><?xml version="1.0" encoding="utf-8"?>
+<p:sld xmlns:a="http://schemas.openxmlformats.org/drawingml/2006/main" xmlns:r="http://schemas.openxmlformats.org/officeDocument/2006/relationships" xmlns:p="http://schemas.openxmlformats.org/presentationml/2006/main">
+  <p:cSld>
+    <p:bg>
+      <p:bgPr>
+        <a:solidFill>
+          <a:schemeClr val="bg1"/>
+        </a:solidFill>
+        <a:effectLst/>
+      </p:bgPr>
+    </p:bg>
+    <p:spTree>
+      <p:nvGrpSpPr>
+        <p:cNvPr id="1" name=""/>
+        <p:cNvGrpSpPr/>
+        <p:nvPr/>
+      </p:nvGrpSpPr>
+      <p:grpSpPr>
+        <a:xfrm>
+          <a:off x="0" y="0"/>
+          <a:ext cx="0" cy="0"/>
+          <a:chOff x="0" y="0"/>
+          <a:chExt cx="0" cy="0"/>
+        </a:xfrm>
+      </p:grpSpPr>
+      <p:cxnSp>
+        <p:nvCxnSpPr>
+          <p:cNvPr id="16" name="Straight Connector 15">
+            <a:extLst>
+              <a:ext uri="{FF2B5EF4-FFF2-40B4-BE49-F238E27FC236}">
+                <a16:creationId xmlns:a16="http://schemas.microsoft.com/office/drawing/2014/main" id="{118E06E4-607B-144B-382B-AD3D06B1EE8C}"/>
+              </a:ext>
+              <a:ext uri="{C183D7F6-B498-43B3-948B-1728B52AA6E4}">
+                <adec:decorative xmlns:adec="http://schemas.microsoft.com/office/drawing/2017/decorative" val="1"/>
+              </a:ext>
+            </a:extLst>
+          </p:cNvPr>
+          <p:cNvCxnSpPr>
+            <a:cxnSpLocks noGrp="1" noRot="1" noChangeAspect="1" noMove="1" noResize="1" noEditPoints="1" noAdjustHandles="1" noChangeArrowheads="1" noChangeShapeType="1"/>
+          </p:cNvCxnSpPr>
+          <p:nvPr>
+            <p:extLst>
+              <p:ext uri="{386F3935-93C4-4BCD-93E2-E3B085C9AB24}">
+                <p16:designElem xmlns:p16="http://schemas.microsoft.com/office/powerpoint/2015/main" val="1"/>
+              </p:ext>
+            </p:extLst>
+          </p:nvPr>
+        </p:nvCxnSpPr>
+        <p:spPr>
+          <a:xfrm>
+            <a:off x="713232" y="1031001"/>
+            <a:ext cx="978862" cy="0"/>
+          </a:xfrm>
+          <a:prstGeom prst="line">
+            <a:avLst/>
+          </a:prstGeom>
+          <a:ln w="76200"/>
+        </p:spPr>
+        <p:style>
+          <a:lnRef idx="1">
+            <a:schemeClr val="accent1"/>
+          </a:lnRef>
+          <a:fillRef idx="0">
+            <a:schemeClr val="accent1"/>
+          </a:fillRef>
+          <a:effectRef idx="0">
+            <a:schemeClr val="accent1"/>
+          </a:effectRef>
+          <a:fontRef idx="minor">
+            <a:schemeClr val="tx1"/>
+          </a:fontRef>
+        </p:style>
+      </p:cxnSp>
+      <p:sp useBgFill="1">
+        <p:nvSpPr>
+          <p:cNvPr id="17" name="Rectangle 16">
+            <a:extLst>
+              <a:ext uri="{FF2B5EF4-FFF2-40B4-BE49-F238E27FC236}">
+                <a16:creationId xmlns:a16="http://schemas.microsoft.com/office/drawing/2014/main" id="{DBDA151C-5770-45E4-AAFF-59E7F403866D}"/>
+              </a:ext>
+              <a:ext uri="{C183D7F6-B498-43B3-948B-1728B52AA6E4}">
+                <adec:decorative xmlns:adec="http://schemas.microsoft.com/office/drawing/2017/decorative" val="1"/>
+              </a:ext>
+            </a:extLst>
+          </p:cNvPr>
+          <p:cNvSpPr>
+            <a:spLocks noGrp="1" noRot="1" noChangeAspect="1" noMove="1" noResize="1" noEditPoints="1" noAdjustHandles="1" noChangeArrowheads="1" noChangeShapeType="1" noTextEdit="1"/>
+          </p:cNvSpPr>
+          <p:nvPr>
+            <p:extLst>
+              <p:ext uri="{386F3935-93C4-4BCD-93E2-E3B085C9AB24}">
+                <p16:designElem xmlns:p16="http://schemas.microsoft.com/office/powerpoint/2015/main" val="1"/>
+              </p:ext>
+            </p:extLst>
+          </p:nvPr>
+        </p:nvSpPr>
+        <p:spPr>
+          <a:xfrm>
+            <a:off x="0" y="0"/>
+            <a:ext cx="12192000" cy="6858000"/>
+          </a:xfrm>
+          <a:prstGeom prst="rect">
+            <a:avLst/>
+          </a:prstGeom>
+          <a:ln w="12700" cap="flat" cmpd="sng" algn="ctr">
+            <a:noFill/>
+            <a:prstDash val="solid"/>
+            <a:miter lim="800000"/>
+          </a:ln>
+          <a:effectLst/>
+          <a:extLst>
+            <a:ext uri="{91240B29-F687-4F45-9708-019B960494DF}">
+              <a14:hiddenLine xmlns:a14="http://schemas.microsoft.com/office/drawing/2010/main" w="12700" cap="flat" cmpd="sng" algn="ctr">
+                <a:solidFill>
+                  <a:schemeClr val="accent1">
+                    <a:shade val="50000"/>
+                  </a:schemeClr>
+                </a:solidFill>
+                <a:prstDash val="solid"/>
+                <a:miter lim="800000"/>
+              </a14:hiddenLine>
+            </a:ext>
+          </a:extLst>
+        </p:spPr>
+        <p:style>
+          <a:lnRef idx="2">
+            <a:schemeClr val="accent1">
+              <a:shade val="50000"/>
+            </a:schemeClr>
+          </a:lnRef>
+          <a:fillRef idx="1">
+            <a:schemeClr val="accent1"/>
+          </a:fillRef>
+          <a:effectRef idx="0">
+            <a:schemeClr val="accent1"/>
+          </a:effectRef>
+          <a:fontRef idx="minor">
+            <a:schemeClr val="lt1"/>
+          </a:fontRef>
+        </p:style>
+        <p:txBody>
+          <a:bodyPr rtlCol="0" anchor="ctr"/>
+          <a:lstStyle/>
+          <a:p>
+            <a:pPr algn="ctr"/>
+            <a:endParaRPr lang="en-US" dirty="0"/>
+          </a:p>
+        </p:txBody>
+      </p:sp>
+      <p:sp>
+        <p:nvSpPr>
+          <p:cNvPr id="2" name="Title 1">
+            <a:extLst>
+              <a:ext uri="{FF2B5EF4-FFF2-40B4-BE49-F238E27FC236}">
+                <a16:creationId xmlns:a16="http://schemas.microsoft.com/office/drawing/2014/main" id="{D68676B2-87FF-6859-9A99-42A57AE0E516}"/>
+              </a:ext>
+            </a:extLst>
+          </p:cNvPr>
+          <p:cNvSpPr>
+            <a:spLocks noGrp="1"/>
+          </p:cNvSpPr>
+          <p:nvPr>
+            <p:ph type="title"/>
+          </p:nvPr>
+        </p:nvSpPr>
+        <p:spPr>
+          <a:xfrm>
+            <a:off x="640080" y="914399"/>
+            <a:ext cx="3000587" cy="4160520"/>
+          </a:xfrm>
+        </p:spPr>
+        <p:txBody>
+          <a:bodyPr vert="horz" lIns="91440" tIns="45720" rIns="91440" bIns="45720" rtlCol="0" anchor="t">
+            <a:normAutofit/>
+          </a:bodyPr>
+          <a:lstStyle/>
+          <a:p>
+            <a:r>
+              <a:rPr lang="en-US"/>
+              <a:t>MEMBERS OF THE TEAM </a:t>
+            </a:r>
+          </a:p>
+        </p:txBody>
+      </p:sp>
+      <p:cxnSp>
+        <p:nvCxnSpPr>
+          <p:cNvPr id="18" name="Straight Connector 17">
+            <a:extLst>
+              <a:ext uri="{FF2B5EF4-FFF2-40B4-BE49-F238E27FC236}">
+                <a16:creationId xmlns:a16="http://schemas.microsoft.com/office/drawing/2014/main" id="{05ADA91C-AD52-A530-A898-AD6E69874598}"/>
+              </a:ext>
+              <a:ext uri="{C183D7F6-B498-43B3-948B-1728B52AA6E4}">
+                <adec:decorative xmlns:adec="http://schemas.microsoft.com/office/drawing/2017/decorative" val="1"/>
+              </a:ext>
+            </a:extLst>
+          </p:cNvPr>
+          <p:cNvCxnSpPr>
+            <a:cxnSpLocks noGrp="1" noRot="1" noChangeAspect="1" noMove="1" noResize="1" noEditPoints="1" noAdjustHandles="1" noChangeArrowheads="1" noChangeShapeType="1"/>
+          </p:cNvCxnSpPr>
+          <p:nvPr>
+            <p:extLst>
+              <p:ext uri="{386F3935-93C4-4BCD-93E2-E3B085C9AB24}">
+                <p16:designElem xmlns:p16="http://schemas.microsoft.com/office/powerpoint/2015/main" val="1"/>
+              </p:ext>
+            </p:extLst>
+          </p:nvPr>
+        </p:nvCxnSpPr>
+        <p:spPr>
+          <a:xfrm>
+            <a:off x="672253" y="6272784"/>
+            <a:ext cx="10847495" cy="0"/>
+          </a:xfrm>
+          <a:prstGeom prst="line">
+            <a:avLst/>
+          </a:prstGeom>
+          <a:ln w="76200"/>
+        </p:spPr>
+        <p:style>
+          <a:lnRef idx="1">
+            <a:schemeClr val="accent1"/>
+          </a:lnRef>
+          <a:fillRef idx="0">
+            <a:schemeClr val="accent1"/>
+          </a:fillRef>
+          <a:effectRef idx="0">
+            <a:schemeClr val="accent1"/>
+          </a:effectRef>
+          <a:fontRef idx="minor">
+            <a:schemeClr val="tx1"/>
+          </a:fontRef>
+        </p:style>
+      </p:cxnSp>
+      <p:graphicFrame>
+        <p:nvGraphicFramePr>
+          <p:cNvPr id="19" name="Text Placeholder 3">
+            <a:extLst>
+              <a:ext uri="{FF2B5EF4-FFF2-40B4-BE49-F238E27FC236}">
+                <a16:creationId xmlns:a16="http://schemas.microsoft.com/office/drawing/2014/main" id="{E1683D03-84FE-D72F-75A7-4D1965D31B9E}"/>
+              </a:ext>
+            </a:extLst>
+          </p:cNvPr>
+          <p:cNvGraphicFramePr/>
+          <p:nvPr>
+            <p:extLst>
+              <p:ext uri="{D42A27DB-BD31-4B8C-83A1-F6EECF244321}">
+                <p14:modId xmlns:p14="http://schemas.microsoft.com/office/powerpoint/2010/main" val="1568747014"/>
+              </p:ext>
+            </p:extLst>
+          </p:nvPr>
+        </p:nvGraphicFramePr>
+        <p:xfrm>
+          <a:off x="4303332" y="891606"/>
+          <a:ext cx="7216416" cy="5111260"/>
+        </p:xfrm>
+        <a:graphic>
+          <a:graphicData uri="http://schemas.openxmlformats.org/drawingml/2006/diagram">
+            <dgm:relIds xmlns:dgm="http://schemas.openxmlformats.org/drawingml/2006/diagram" xmlns:r="http://schemas.openxmlformats.org/officeDocument/2006/relationships" r:dm="rId2" r:lo="rId3" r:qs="rId4" r:cs="rId5"/>
+          </a:graphicData>
+        </a:graphic>
+      </p:graphicFrame>
+    </p:spTree>
+    <p:extLst>
+      <p:ext uri="{BB962C8B-B14F-4D97-AF65-F5344CB8AC3E}">
+        <p14:creationId xmlns:p14="http://schemas.microsoft.com/office/powerpoint/2010/main" val="238876658"/>
+      </p:ext>
+    </p:extLst>
+  </p:cSld>
+  <p:clrMapOvr>
+    <a:masterClrMapping/>
+  </p:clrMapOvr>
+</p:sld>
+</file>
+
+<file path=ppt/slides/slide20.xml><?xml version="1.0" encoding="utf-8"?>
 <p:sld xmlns:a="http://schemas.openxmlformats.org/drawingml/2006/main" xmlns:r="http://schemas.openxmlformats.org/officeDocument/2006/relationships" xmlns:p="http://schemas.openxmlformats.org/presentationml/2006/main">
   <p:cSld>
     <p:spTree>
@@ -26619,7 +27618,7 @@
 </p:sld>
 </file>
 
-<file path=ppt/slides/slide15.xml><?xml version="1.0" encoding="utf-8"?>
+<file path=ppt/slides/slide21.xml><?xml version="1.0" encoding="utf-8"?>
 <p:sld xmlns:a="http://schemas.openxmlformats.org/drawingml/2006/main" xmlns:r="http://schemas.openxmlformats.org/officeDocument/2006/relationships" xmlns:p="http://schemas.openxmlformats.org/presentationml/2006/main">
   <p:cSld>
     <p:spTree>
@@ -26708,7 +27707,7 @@
 </p:sld>
 </file>
 
-<file path=ppt/slides/slide16.xml><?xml version="1.0" encoding="utf-8"?>
+<file path=ppt/slides/slide22.xml><?xml version="1.0" encoding="utf-8"?>
 <p:sld xmlns:a="http://schemas.openxmlformats.org/drawingml/2006/main" xmlns:r="http://schemas.openxmlformats.org/officeDocument/2006/relationships" xmlns:p="http://schemas.openxmlformats.org/presentationml/2006/main">
   <p:cSld>
     <p:bg>
@@ -27015,7 +28014,7 @@
 </p:sld>
 </file>
 
-<file path=ppt/slides/slide17.xml><?xml version="1.0" encoding="utf-8"?>
+<file path=ppt/slides/slide23.xml><?xml version="1.0" encoding="utf-8"?>
 <p:sld xmlns:a="http://schemas.openxmlformats.org/drawingml/2006/main" xmlns:r="http://schemas.openxmlformats.org/officeDocument/2006/relationships" xmlns:p="http://schemas.openxmlformats.org/presentationml/2006/main">
   <p:cSld>
     <p:bg>
@@ -27520,279 +28519,6 @@
 </p:sld>
 </file>
 
-<file path=ppt/slides/slide2.xml><?xml version="1.0" encoding="utf-8"?>
-<p:sld xmlns:a="http://schemas.openxmlformats.org/drawingml/2006/main" xmlns:r="http://schemas.openxmlformats.org/officeDocument/2006/relationships" xmlns:p="http://schemas.openxmlformats.org/presentationml/2006/main">
-  <p:cSld>
-    <p:bg>
-      <p:bgPr>
-        <a:solidFill>
-          <a:schemeClr val="bg1"/>
-        </a:solidFill>
-        <a:effectLst/>
-      </p:bgPr>
-    </p:bg>
-    <p:spTree>
-      <p:nvGrpSpPr>
-        <p:cNvPr id="1" name=""/>
-        <p:cNvGrpSpPr/>
-        <p:nvPr/>
-      </p:nvGrpSpPr>
-      <p:grpSpPr>
-        <a:xfrm>
-          <a:off x="0" y="0"/>
-          <a:ext cx="0" cy="0"/>
-          <a:chOff x="0" y="0"/>
-          <a:chExt cx="0" cy="0"/>
-        </a:xfrm>
-      </p:grpSpPr>
-      <p:cxnSp>
-        <p:nvCxnSpPr>
-          <p:cNvPr id="16" name="Straight Connector 15">
-            <a:extLst>
-              <a:ext uri="{FF2B5EF4-FFF2-40B4-BE49-F238E27FC236}">
-                <a16:creationId xmlns:a16="http://schemas.microsoft.com/office/drawing/2014/main" id="{118E06E4-607B-144B-382B-AD3D06B1EE8C}"/>
-              </a:ext>
-              <a:ext uri="{C183D7F6-B498-43B3-948B-1728B52AA6E4}">
-                <adec:decorative xmlns:adec="http://schemas.microsoft.com/office/drawing/2017/decorative" val="1"/>
-              </a:ext>
-            </a:extLst>
-          </p:cNvPr>
-          <p:cNvCxnSpPr>
-            <a:cxnSpLocks noGrp="1" noRot="1" noChangeAspect="1" noMove="1" noResize="1" noEditPoints="1" noAdjustHandles="1" noChangeArrowheads="1" noChangeShapeType="1"/>
-          </p:cNvCxnSpPr>
-          <p:nvPr>
-            <p:extLst>
-              <p:ext uri="{386F3935-93C4-4BCD-93E2-E3B085C9AB24}">
-                <p16:designElem xmlns:p16="http://schemas.microsoft.com/office/powerpoint/2015/main" val="1"/>
-              </p:ext>
-            </p:extLst>
-          </p:nvPr>
-        </p:nvCxnSpPr>
-        <p:spPr>
-          <a:xfrm>
-            <a:off x="713232" y="1031001"/>
-            <a:ext cx="978862" cy="0"/>
-          </a:xfrm>
-          <a:prstGeom prst="line">
-            <a:avLst/>
-          </a:prstGeom>
-          <a:ln w="76200"/>
-        </p:spPr>
-        <p:style>
-          <a:lnRef idx="1">
-            <a:schemeClr val="accent1"/>
-          </a:lnRef>
-          <a:fillRef idx="0">
-            <a:schemeClr val="accent1"/>
-          </a:fillRef>
-          <a:effectRef idx="0">
-            <a:schemeClr val="accent1"/>
-          </a:effectRef>
-          <a:fontRef idx="minor">
-            <a:schemeClr val="tx1"/>
-          </a:fontRef>
-        </p:style>
-      </p:cxnSp>
-      <p:sp useBgFill="1">
-        <p:nvSpPr>
-          <p:cNvPr id="17" name="Rectangle 16">
-            <a:extLst>
-              <a:ext uri="{FF2B5EF4-FFF2-40B4-BE49-F238E27FC236}">
-                <a16:creationId xmlns:a16="http://schemas.microsoft.com/office/drawing/2014/main" id="{DBDA151C-5770-45E4-AAFF-59E7F403866D}"/>
-              </a:ext>
-              <a:ext uri="{C183D7F6-B498-43B3-948B-1728B52AA6E4}">
-                <adec:decorative xmlns:adec="http://schemas.microsoft.com/office/drawing/2017/decorative" val="1"/>
-              </a:ext>
-            </a:extLst>
-          </p:cNvPr>
-          <p:cNvSpPr>
-            <a:spLocks noGrp="1" noRot="1" noChangeAspect="1" noMove="1" noResize="1" noEditPoints="1" noAdjustHandles="1" noChangeArrowheads="1" noChangeShapeType="1" noTextEdit="1"/>
-          </p:cNvSpPr>
-          <p:nvPr>
-            <p:extLst>
-              <p:ext uri="{386F3935-93C4-4BCD-93E2-E3B085C9AB24}">
-                <p16:designElem xmlns:p16="http://schemas.microsoft.com/office/powerpoint/2015/main" val="1"/>
-              </p:ext>
-            </p:extLst>
-          </p:nvPr>
-        </p:nvSpPr>
-        <p:spPr>
-          <a:xfrm>
-            <a:off x="0" y="0"/>
-            <a:ext cx="12192000" cy="6858000"/>
-          </a:xfrm>
-          <a:prstGeom prst="rect">
-            <a:avLst/>
-          </a:prstGeom>
-          <a:ln w="12700" cap="flat" cmpd="sng" algn="ctr">
-            <a:noFill/>
-            <a:prstDash val="solid"/>
-            <a:miter lim="800000"/>
-          </a:ln>
-          <a:effectLst/>
-          <a:extLst>
-            <a:ext uri="{91240B29-F687-4F45-9708-019B960494DF}">
-              <a14:hiddenLine xmlns:a14="http://schemas.microsoft.com/office/drawing/2010/main" w="12700" cap="flat" cmpd="sng" algn="ctr">
-                <a:solidFill>
-                  <a:schemeClr val="accent1">
-                    <a:shade val="50000"/>
-                  </a:schemeClr>
-                </a:solidFill>
-                <a:prstDash val="solid"/>
-                <a:miter lim="800000"/>
-              </a14:hiddenLine>
-            </a:ext>
-          </a:extLst>
-        </p:spPr>
-        <p:style>
-          <a:lnRef idx="2">
-            <a:schemeClr val="accent1">
-              <a:shade val="50000"/>
-            </a:schemeClr>
-          </a:lnRef>
-          <a:fillRef idx="1">
-            <a:schemeClr val="accent1"/>
-          </a:fillRef>
-          <a:effectRef idx="0">
-            <a:schemeClr val="accent1"/>
-          </a:effectRef>
-          <a:fontRef idx="minor">
-            <a:schemeClr val="lt1"/>
-          </a:fontRef>
-        </p:style>
-        <p:txBody>
-          <a:bodyPr rtlCol="0" anchor="ctr"/>
-          <a:lstStyle/>
-          <a:p>
-            <a:pPr algn="ctr"/>
-            <a:endParaRPr lang="en-US" dirty="0"/>
-          </a:p>
-        </p:txBody>
-      </p:sp>
-      <p:sp>
-        <p:nvSpPr>
-          <p:cNvPr id="2" name="Title 1">
-            <a:extLst>
-              <a:ext uri="{FF2B5EF4-FFF2-40B4-BE49-F238E27FC236}">
-                <a16:creationId xmlns:a16="http://schemas.microsoft.com/office/drawing/2014/main" id="{D68676B2-87FF-6859-9A99-42A57AE0E516}"/>
-              </a:ext>
-            </a:extLst>
-          </p:cNvPr>
-          <p:cNvSpPr>
-            <a:spLocks noGrp="1"/>
-          </p:cNvSpPr>
-          <p:nvPr>
-            <p:ph type="title"/>
-          </p:nvPr>
-        </p:nvSpPr>
-        <p:spPr>
-          <a:xfrm>
-            <a:off x="640080" y="914399"/>
-            <a:ext cx="3000587" cy="4160520"/>
-          </a:xfrm>
-        </p:spPr>
-        <p:txBody>
-          <a:bodyPr vert="horz" lIns="91440" tIns="45720" rIns="91440" bIns="45720" rtlCol="0" anchor="t">
-            <a:normAutofit/>
-          </a:bodyPr>
-          <a:lstStyle/>
-          <a:p>
-            <a:r>
-              <a:rPr lang="en-US"/>
-              <a:t>MEMBERS OF THE TEAM </a:t>
-            </a:r>
-          </a:p>
-        </p:txBody>
-      </p:sp>
-      <p:cxnSp>
-        <p:nvCxnSpPr>
-          <p:cNvPr id="18" name="Straight Connector 17">
-            <a:extLst>
-              <a:ext uri="{FF2B5EF4-FFF2-40B4-BE49-F238E27FC236}">
-                <a16:creationId xmlns:a16="http://schemas.microsoft.com/office/drawing/2014/main" id="{05ADA91C-AD52-A530-A898-AD6E69874598}"/>
-              </a:ext>
-              <a:ext uri="{C183D7F6-B498-43B3-948B-1728B52AA6E4}">
-                <adec:decorative xmlns:adec="http://schemas.microsoft.com/office/drawing/2017/decorative" val="1"/>
-              </a:ext>
-            </a:extLst>
-          </p:cNvPr>
-          <p:cNvCxnSpPr>
-            <a:cxnSpLocks noGrp="1" noRot="1" noChangeAspect="1" noMove="1" noResize="1" noEditPoints="1" noAdjustHandles="1" noChangeArrowheads="1" noChangeShapeType="1"/>
-          </p:cNvCxnSpPr>
-          <p:nvPr>
-            <p:extLst>
-              <p:ext uri="{386F3935-93C4-4BCD-93E2-E3B085C9AB24}">
-                <p16:designElem xmlns:p16="http://schemas.microsoft.com/office/powerpoint/2015/main" val="1"/>
-              </p:ext>
-            </p:extLst>
-          </p:nvPr>
-        </p:nvCxnSpPr>
-        <p:spPr>
-          <a:xfrm>
-            <a:off x="672253" y="6272784"/>
-            <a:ext cx="10847495" cy="0"/>
-          </a:xfrm>
-          <a:prstGeom prst="line">
-            <a:avLst/>
-          </a:prstGeom>
-          <a:ln w="76200"/>
-        </p:spPr>
-        <p:style>
-          <a:lnRef idx="1">
-            <a:schemeClr val="accent1"/>
-          </a:lnRef>
-          <a:fillRef idx="0">
-            <a:schemeClr val="accent1"/>
-          </a:fillRef>
-          <a:effectRef idx="0">
-            <a:schemeClr val="accent1"/>
-          </a:effectRef>
-          <a:fontRef idx="minor">
-            <a:schemeClr val="tx1"/>
-          </a:fontRef>
-        </p:style>
-      </p:cxnSp>
-      <p:graphicFrame>
-        <p:nvGraphicFramePr>
-          <p:cNvPr id="19" name="Text Placeholder 3">
-            <a:extLst>
-              <a:ext uri="{FF2B5EF4-FFF2-40B4-BE49-F238E27FC236}">
-                <a16:creationId xmlns:a16="http://schemas.microsoft.com/office/drawing/2014/main" id="{E1683D03-84FE-D72F-75A7-4D1965D31B9E}"/>
-              </a:ext>
-            </a:extLst>
-          </p:cNvPr>
-          <p:cNvGraphicFramePr/>
-          <p:nvPr>
-            <p:extLst>
-              <p:ext uri="{D42A27DB-BD31-4B8C-83A1-F6EECF244321}">
-                <p14:modId xmlns:p14="http://schemas.microsoft.com/office/powerpoint/2010/main" val="1568747014"/>
-              </p:ext>
-            </p:extLst>
-          </p:nvPr>
-        </p:nvGraphicFramePr>
-        <p:xfrm>
-          <a:off x="4303332" y="891606"/>
-          <a:ext cx="7216416" cy="5111260"/>
-        </p:xfrm>
-        <a:graphic>
-          <a:graphicData uri="http://schemas.openxmlformats.org/drawingml/2006/diagram">
-            <dgm:relIds xmlns:dgm="http://schemas.openxmlformats.org/drawingml/2006/diagram" xmlns:r="http://schemas.openxmlformats.org/officeDocument/2006/relationships" r:dm="rId2" r:lo="rId3" r:qs="rId4" r:cs="rId5"/>
-          </a:graphicData>
-        </a:graphic>
-      </p:graphicFrame>
-    </p:spTree>
-    <p:extLst>
-      <p:ext uri="{BB962C8B-B14F-4D97-AF65-F5344CB8AC3E}">
-        <p14:creationId xmlns:p14="http://schemas.microsoft.com/office/powerpoint/2010/main" val="238876658"/>
-      </p:ext>
-    </p:extLst>
-  </p:cSld>
-  <p:clrMapOvr>
-    <a:masterClrMapping/>
-  </p:clrMapOvr>
-</p:sld>
-</file>
-
 <file path=ppt/slides/slide3.xml><?xml version="1.0" encoding="utf-8"?>
 <p:sld xmlns:a="http://schemas.openxmlformats.org/drawingml/2006/main" xmlns:r="http://schemas.openxmlformats.org/officeDocument/2006/relationships" xmlns:p="http://schemas.openxmlformats.org/presentationml/2006/main">
   <p:cSld>
@@ -28210,44 +28936,6 @@
           </a:p>
         </p:txBody>
       </p:sp>
-      <p:pic>
-        <p:nvPicPr>
-          <p:cNvPr id="6" name="Content Placeholder 5">
-            <a:extLst>
-              <a:ext uri="{FF2B5EF4-FFF2-40B4-BE49-F238E27FC236}">
-                <a16:creationId xmlns:a16="http://schemas.microsoft.com/office/drawing/2014/main" id="{2F9AF904-61AD-75F3-E3F1-4FE9AE9612BD}"/>
-              </a:ext>
-            </a:extLst>
-          </p:cNvPr>
-          <p:cNvPicPr>
-            <a:picLocks noGrp="1" noChangeAspect="1"/>
-          </p:cNvPicPr>
-          <p:nvPr>
-            <p:ph idx="1"/>
-          </p:nvPr>
-        </p:nvPicPr>
-        <p:blipFill>
-          <a:blip r:embed="rId2">
-            <a:extLst>
-              <a:ext uri="{28A0092B-C50C-407E-A947-70E740481C1C}">
-                <a14:useLocalDpi xmlns:a14="http://schemas.microsoft.com/office/drawing/2010/main" val="0"/>
-              </a:ext>
-            </a:extLst>
-          </a:blip>
-          <a:stretch>
-            <a:fillRect/>
-          </a:stretch>
-        </p:blipFill>
-        <p:spPr>
-          <a:xfrm>
-            <a:off x="5609351" y="1030288"/>
-            <a:ext cx="5250023" cy="2868612"/>
-          </a:xfrm>
-          <a:prstGeom prst="rect">
-            <a:avLst/>
-          </a:prstGeom>
-        </p:spPr>
-      </p:pic>
       <p:sp>
         <p:nvSpPr>
           <p:cNvPr id="4" name="Text Placeholder 3">
@@ -28291,7 +28979,7 @@
           <p:nvPr/>
         </p:nvPicPr>
         <p:blipFill>
-          <a:blip r:embed="rId3" cstate="print">
+          <a:blip r:embed="rId2" cstate="print">
             <a:extLst>
               <a:ext uri="{28A0092B-C50C-407E-A947-70E740481C1C}">
                 <a14:useLocalDpi xmlns:a14="http://schemas.microsoft.com/office/drawing/2010/main" val="0"/>
@@ -28304,14 +28992,39 @@
         </p:blipFill>
         <p:spPr>
           <a:xfrm>
-            <a:off x="5609351" y="3968750"/>
-            <a:ext cx="4461749" cy="2501900"/>
+            <a:off x="3994150" y="1304290"/>
+            <a:ext cx="7766049" cy="5166360"/>
           </a:xfrm>
           <a:prstGeom prst="rect">
             <a:avLst/>
           </a:prstGeom>
         </p:spPr>
       </p:pic>
+      <p:sp>
+        <p:nvSpPr>
+          <p:cNvPr id="9" name="Content Placeholder 8">
+            <a:extLst>
+              <a:ext uri="{FF2B5EF4-FFF2-40B4-BE49-F238E27FC236}">
+                <a16:creationId xmlns:a16="http://schemas.microsoft.com/office/drawing/2014/main" id="{659847C0-A191-3DB6-90E9-7B9E905500B6}"/>
+              </a:ext>
+            </a:extLst>
+          </p:cNvPr>
+          <p:cNvSpPr>
+            <a:spLocks noGrp="1"/>
+          </p:cNvSpPr>
+          <p:nvPr>
+            <p:ph idx="1"/>
+          </p:nvPr>
+        </p:nvSpPr>
+        <p:spPr/>
+        <p:txBody>
+          <a:bodyPr/>
+          <a:lstStyle/>
+          <a:p>
+            <a:endParaRPr lang="en-GB" dirty="0"/>
+          </a:p>
+        </p:txBody>
+      </p:sp>
     </p:spTree>
     <p:extLst>
       <p:ext uri="{BB962C8B-B14F-4D97-AF65-F5344CB8AC3E}">
@@ -28326,6 +29039,144 @@
 </file>
 
 <file path=ppt/slides/slide6.xml><?xml version="1.0" encoding="utf-8"?>
+<p:sld xmlns:a="http://schemas.openxmlformats.org/drawingml/2006/main" xmlns:r="http://schemas.openxmlformats.org/officeDocument/2006/relationships" xmlns:p="http://schemas.openxmlformats.org/presentationml/2006/main">
+  <p:cSld>
+    <p:spTree>
+      <p:nvGrpSpPr>
+        <p:cNvPr id="1" name=""/>
+        <p:cNvGrpSpPr/>
+        <p:nvPr/>
+      </p:nvGrpSpPr>
+      <p:grpSpPr>
+        <a:xfrm>
+          <a:off x="0" y="0"/>
+          <a:ext cx="0" cy="0"/>
+          <a:chOff x="0" y="0"/>
+          <a:chExt cx="0" cy="0"/>
+        </a:xfrm>
+      </p:grpSpPr>
+      <p:pic>
+        <p:nvPicPr>
+          <p:cNvPr id="2" name="Content Placeholder 5">
+            <a:extLst>
+              <a:ext uri="{FF2B5EF4-FFF2-40B4-BE49-F238E27FC236}">
+                <a16:creationId xmlns:a16="http://schemas.microsoft.com/office/drawing/2014/main" id="{6C21FAEE-18F1-8B47-7CFF-36B1445EF966}"/>
+              </a:ext>
+            </a:extLst>
+          </p:cNvPr>
+          <p:cNvPicPr>
+            <a:picLocks noChangeAspect="1"/>
+          </p:cNvPicPr>
+          <p:nvPr/>
+        </p:nvPicPr>
+        <p:blipFill>
+          <a:blip r:embed="rId2">
+            <a:extLst>
+              <a:ext uri="{28A0092B-C50C-407E-A947-70E740481C1C}">
+                <a14:useLocalDpi xmlns:a14="http://schemas.microsoft.com/office/drawing/2010/main" val="0"/>
+              </a:ext>
+            </a:extLst>
+          </a:blip>
+          <a:stretch>
+            <a:fillRect/>
+          </a:stretch>
+        </p:blipFill>
+        <p:spPr>
+          <a:xfrm>
+            <a:off x="184151" y="76200"/>
+            <a:ext cx="5594349" cy="3175000"/>
+          </a:xfrm>
+          <a:prstGeom prst="rect">
+            <a:avLst/>
+          </a:prstGeom>
+        </p:spPr>
+      </p:pic>
+      <p:pic>
+        <p:nvPicPr>
+          <p:cNvPr id="3" name="Picture 2">
+            <a:extLst>
+              <a:ext uri="{FF2B5EF4-FFF2-40B4-BE49-F238E27FC236}">
+                <a16:creationId xmlns:a16="http://schemas.microsoft.com/office/drawing/2014/main" id="{D8F49FCC-6D77-E584-7C72-6BB3B28F5F03}"/>
+              </a:ext>
+            </a:extLst>
+          </p:cNvPr>
+          <p:cNvPicPr>
+            <a:picLocks noChangeAspect="1"/>
+          </p:cNvPicPr>
+          <p:nvPr/>
+        </p:nvPicPr>
+        <p:blipFill>
+          <a:blip r:embed="rId3">
+            <a:extLst>
+              <a:ext uri="{28A0092B-C50C-407E-A947-70E740481C1C}">
+                <a14:useLocalDpi xmlns:a14="http://schemas.microsoft.com/office/drawing/2010/main" val="0"/>
+              </a:ext>
+            </a:extLst>
+          </a:blip>
+          <a:stretch>
+            <a:fillRect/>
+          </a:stretch>
+        </p:blipFill>
+        <p:spPr>
+          <a:xfrm>
+            <a:off x="5822950" y="0"/>
+            <a:ext cx="6089650" cy="3251200"/>
+          </a:xfrm>
+          <a:prstGeom prst="rect">
+            <a:avLst/>
+          </a:prstGeom>
+        </p:spPr>
+      </p:pic>
+      <p:pic>
+        <p:nvPicPr>
+          <p:cNvPr id="4" name="Picture 3">
+            <a:extLst>
+              <a:ext uri="{FF2B5EF4-FFF2-40B4-BE49-F238E27FC236}">
+                <a16:creationId xmlns:a16="http://schemas.microsoft.com/office/drawing/2014/main" id="{5C7911AB-B10D-FC3F-57F2-105F70E088B3}"/>
+              </a:ext>
+            </a:extLst>
+          </p:cNvPr>
+          <p:cNvPicPr>
+            <a:picLocks noChangeAspect="1"/>
+          </p:cNvPicPr>
+          <p:nvPr/>
+        </p:nvPicPr>
+        <p:blipFill>
+          <a:blip r:embed="rId4">
+            <a:extLst>
+              <a:ext uri="{28A0092B-C50C-407E-A947-70E740481C1C}">
+                <a14:useLocalDpi xmlns:a14="http://schemas.microsoft.com/office/drawing/2010/main" val="0"/>
+              </a:ext>
+            </a:extLst>
+          </a:blip>
+          <a:stretch>
+            <a:fillRect/>
+          </a:stretch>
+        </p:blipFill>
+        <p:spPr>
+          <a:xfrm>
+            <a:off x="739071" y="3429000"/>
+            <a:ext cx="5941129" cy="3352800"/>
+          </a:xfrm>
+          <a:prstGeom prst="rect">
+            <a:avLst/>
+          </a:prstGeom>
+        </p:spPr>
+      </p:pic>
+    </p:spTree>
+    <p:extLst>
+      <p:ext uri="{BB962C8B-B14F-4D97-AF65-F5344CB8AC3E}">
+        <p14:creationId xmlns:p14="http://schemas.microsoft.com/office/powerpoint/2010/main" val="2668207149"/>
+      </p:ext>
+    </p:extLst>
+  </p:cSld>
+  <p:clrMapOvr>
+    <a:masterClrMapping/>
+  </p:clrMapOvr>
+</p:sld>
+</file>
+
+<file path=ppt/slides/slide7.xml><?xml version="1.0" encoding="utf-8"?>
 <p:sld xmlns:a="http://schemas.openxmlformats.org/drawingml/2006/main" xmlns:r="http://schemas.openxmlformats.org/officeDocument/2006/relationships" xmlns:p="http://schemas.openxmlformats.org/presentationml/2006/main">
   <p:cSld>
     <p:spTree>
@@ -28468,7 +29319,7 @@
 </p:sld>
 </file>
 
-<file path=ppt/slides/slide7.xml><?xml version="1.0" encoding="utf-8"?>
+<file path=ppt/slides/slide8.xml><?xml version="1.0" encoding="utf-8"?>
 <p:sld xmlns:a="http://schemas.openxmlformats.org/drawingml/2006/main" xmlns:r="http://schemas.openxmlformats.org/officeDocument/2006/relationships" xmlns:p="http://schemas.openxmlformats.org/presentationml/2006/main">
   <p:cSld>
     <p:spTree>
@@ -28485,77 +29336,19 @@
           <a:chExt cx="0" cy="0"/>
         </a:xfrm>
       </p:grpSpPr>
-      <p:sp>
-        <p:nvSpPr>
-          <p:cNvPr id="2" name="Title 1">
+      <p:pic>
+        <p:nvPicPr>
+          <p:cNvPr id="3" name="Picture 2">
             <a:extLst>
               <a:ext uri="{FF2B5EF4-FFF2-40B4-BE49-F238E27FC236}">
-                <a16:creationId xmlns:a16="http://schemas.microsoft.com/office/drawing/2014/main" id="{B8926833-7D5E-2173-1364-D5EA126C6694}"/>
-              </a:ext>
-            </a:extLst>
-          </p:cNvPr>
-          <p:cNvSpPr>
-            <a:spLocks noGrp="1"/>
-          </p:cNvSpPr>
-          <p:nvPr>
-            <p:ph type="title"/>
-          </p:nvPr>
-        </p:nvSpPr>
-        <p:spPr/>
-        <p:txBody>
-          <a:bodyPr/>
-          <a:lstStyle/>
-          <a:p>
-            <a:r>
-              <a:rPr lang="en-GB" dirty="0"/>
-              <a:t>MINI PROJECT 2 </a:t>
-            </a:r>
-          </a:p>
-        </p:txBody>
-      </p:sp>
-      <p:sp>
-        <p:nvSpPr>
-          <p:cNvPr id="4" name="Text Placeholder 3">
-            <a:extLst>
-              <a:ext uri="{FF2B5EF4-FFF2-40B4-BE49-F238E27FC236}">
-                <a16:creationId xmlns:a16="http://schemas.microsoft.com/office/drawing/2014/main" id="{97FDDD8A-2907-026E-9427-A99094637217}"/>
-              </a:ext>
-            </a:extLst>
-          </p:cNvPr>
-          <p:cNvSpPr>
-            <a:spLocks noGrp="1"/>
-          </p:cNvSpPr>
-          <p:nvPr>
-            <p:ph type="body" sz="half" idx="2"/>
-          </p:nvPr>
-        </p:nvSpPr>
-        <p:spPr/>
-        <p:txBody>
-          <a:bodyPr/>
-          <a:lstStyle/>
-          <a:p>
-            <a:r>
-              <a:rPr lang="en-GB" dirty="0"/>
-              <a:t>EVIDENCE </a:t>
-            </a:r>
-          </a:p>
-        </p:txBody>
-      </p:sp>
-      <p:pic>
-        <p:nvPicPr>
-          <p:cNvPr id="1026" name="Picture 2">
-            <a:extLst>
-              <a:ext uri="{FF2B5EF4-FFF2-40B4-BE49-F238E27FC236}">
-                <a16:creationId xmlns:a16="http://schemas.microsoft.com/office/drawing/2014/main" id="{E3852B06-9BA9-F05A-B27E-EE71BD364A75}"/>
+                <a16:creationId xmlns:a16="http://schemas.microsoft.com/office/drawing/2014/main" id="{7566FDBB-DD71-C256-51D3-1F4392FC2132}"/>
               </a:ext>
             </a:extLst>
           </p:cNvPr>
           <p:cNvPicPr>
-            <a:picLocks noGrp="1" noChangeAspect="1" noChangeArrowheads="1"/>
+            <a:picLocks noChangeAspect="1"/>
           </p:cNvPicPr>
-          <p:nvPr>
-            <p:ph idx="1"/>
-          </p:nvPr>
+          <p:nvPr/>
         </p:nvPicPr>
         <p:blipFill>
           <a:blip r:embed="rId2">
@@ -28565,35 +29358,24 @@
               </a:ext>
             </a:extLst>
           </a:blip>
-          <a:srcRect/>
           <a:stretch>
             <a:fillRect/>
           </a:stretch>
         </p:blipFill>
-        <p:spPr bwMode="auto">
+        <p:spPr>
           <a:xfrm>
-            <a:off x="6065474" y="1030288"/>
-            <a:ext cx="4337776" cy="5167312"/>
+            <a:off x="3638490" y="0"/>
+            <a:ext cx="4915020" cy="6858000"/>
           </a:xfrm>
           <a:prstGeom prst="rect">
             <a:avLst/>
           </a:prstGeom>
-          <a:noFill/>
-          <a:extLst>
-            <a:ext uri="{909E8E84-426E-40DD-AFC4-6F175D3DCCD1}">
-              <a14:hiddenFill xmlns:a14="http://schemas.microsoft.com/office/drawing/2010/main">
-                <a:solidFill>
-                  <a:srgbClr val="FFFFFF"/>
-                </a:solidFill>
-              </a14:hiddenFill>
-            </a:ext>
-          </a:extLst>
         </p:spPr>
       </p:pic>
     </p:spTree>
     <p:extLst>
       <p:ext uri="{BB962C8B-B14F-4D97-AF65-F5344CB8AC3E}">
-        <p14:creationId xmlns:p14="http://schemas.microsoft.com/office/powerpoint/2010/main" val="525024259"/>
+        <p14:creationId xmlns:p14="http://schemas.microsoft.com/office/powerpoint/2010/main" val="2583977426"/>
       </p:ext>
     </p:extLst>
   </p:cSld>
@@ -28603,7 +29385,7 @@
 </p:sld>
 </file>
 
-<file path=ppt/slides/slide8.xml><?xml version="1.0" encoding="utf-8"?>
+<file path=ppt/slides/slide9.xml><?xml version="1.0" encoding="utf-8"?>
 <p:sld xmlns:a="http://schemas.openxmlformats.org/drawingml/2006/main" xmlns:r="http://schemas.openxmlformats.org/officeDocument/2006/relationships" xmlns:p="http://schemas.openxmlformats.org/presentationml/2006/main">
   <p:cSld>
     <p:spTree>
@@ -28738,200 +29520,9 @@
 </p:sld>
 </file>
 
-<file path=ppt/slides/slide9.xml><?xml version="1.0" encoding="utf-8"?>
-<p:sld xmlns:a="http://schemas.openxmlformats.org/drawingml/2006/main" xmlns:r="http://schemas.openxmlformats.org/officeDocument/2006/relationships" xmlns:p="http://schemas.openxmlformats.org/presentationml/2006/main">
-  <p:cSld>
-    <p:spTree>
-      <p:nvGrpSpPr>
-        <p:cNvPr id="1" name=""/>
-        <p:cNvGrpSpPr/>
-        <p:nvPr/>
-      </p:nvGrpSpPr>
-      <p:grpSpPr>
-        <a:xfrm>
-          <a:off x="0" y="0"/>
-          <a:ext cx="0" cy="0"/>
-          <a:chOff x="0" y="0"/>
-          <a:chExt cx="0" cy="0"/>
-        </a:xfrm>
-      </p:grpSpPr>
-      <p:sp>
-        <p:nvSpPr>
-          <p:cNvPr id="2" name="Title 1">
-            <a:extLst>
-              <a:ext uri="{FF2B5EF4-FFF2-40B4-BE49-F238E27FC236}">
-                <a16:creationId xmlns:a16="http://schemas.microsoft.com/office/drawing/2014/main" id="{B1C87C4A-941B-DF01-85B0-AB8E4AC029BA}"/>
-              </a:ext>
-            </a:extLst>
-          </p:cNvPr>
-          <p:cNvSpPr>
-            <a:spLocks noGrp="1"/>
-          </p:cNvSpPr>
-          <p:nvPr>
-            <p:ph type="title"/>
-          </p:nvPr>
-        </p:nvSpPr>
-        <p:spPr/>
-        <p:txBody>
-          <a:bodyPr/>
-          <a:lstStyle/>
-          <a:p>
-            <a:r>
-              <a:rPr lang="en-GB" dirty="0"/>
-              <a:t>MINI PROJECT 2 </a:t>
-            </a:r>
-          </a:p>
-        </p:txBody>
-      </p:sp>
-      <p:sp>
-        <p:nvSpPr>
-          <p:cNvPr id="3" name="Content Placeholder 2">
-            <a:extLst>
-              <a:ext uri="{FF2B5EF4-FFF2-40B4-BE49-F238E27FC236}">
-                <a16:creationId xmlns:a16="http://schemas.microsoft.com/office/drawing/2014/main" id="{59A19A6E-D8CC-CB99-A1CE-FF6F93DD89C2}"/>
-              </a:ext>
-            </a:extLst>
-          </p:cNvPr>
-          <p:cNvSpPr>
-            <a:spLocks noGrp="1"/>
-          </p:cNvSpPr>
-          <p:nvPr>
-            <p:ph idx="1"/>
-          </p:nvPr>
-        </p:nvSpPr>
-        <p:spPr/>
-        <p:txBody>
-          <a:bodyPr>
-            <a:normAutofit fontScale="77500" lnSpcReduction="20000"/>
-          </a:bodyPr>
-          <a:lstStyle/>
-          <a:p>
-            <a:pPr fontAlgn="base"/>
-            <a:r>
-              <a:rPr lang="en-GB" dirty="0"/>
-              <a:t>In testing we have check different test cases and these are:</a:t>
-            </a:r>
-            <a:r>
-              <a:rPr lang="en-US" dirty="0"/>
-              <a:t>​</a:t>
-            </a:r>
-          </a:p>
-          <a:p>
-            <a:pPr fontAlgn="base"/>
-            <a:r>
-              <a:rPr lang="en-GB" b="1" dirty="0"/>
-              <a:t>Normal Cases: </a:t>
-            </a:r>
-            <a:r>
-              <a:rPr lang="en-GB" dirty="0"/>
-              <a:t>Tested all the correct input(quantity, sizes, toppings and delivery).</a:t>
-            </a:r>
-            <a:r>
-              <a:rPr lang="en-US" dirty="0"/>
-              <a:t>​</a:t>
-            </a:r>
-          </a:p>
-          <a:p>
-            <a:pPr fontAlgn="base"/>
-            <a:r>
-              <a:rPr lang="en-GB" b="1" dirty="0"/>
-              <a:t>Boundary Cases: </a:t>
-            </a:r>
-            <a:r>
-              <a:rPr lang="en-GB" dirty="0"/>
-              <a:t>Checked the limits for making sure about the system work. </a:t>
-            </a:r>
-            <a:r>
-              <a:rPr lang="en-US" dirty="0"/>
-              <a:t>​</a:t>
-            </a:r>
-          </a:p>
-          <a:p>
-            <a:pPr fontAlgn="base"/>
-            <a:r>
-              <a:rPr lang="en-GB" b="1" dirty="0"/>
-              <a:t>Abnormal Cases: </a:t>
-            </a:r>
-            <a:r>
-              <a:rPr lang="en-GB" dirty="0"/>
-              <a:t>Tested all the incorrect input like, (empty spaces, dots instead of correct information).</a:t>
-            </a:r>
-            <a:r>
-              <a:rPr lang="en-US" dirty="0"/>
-              <a:t>​</a:t>
-            </a:r>
-          </a:p>
-          <a:p>
-            <a:pPr fontAlgn="base"/>
-            <a:r>
-              <a:rPr lang="en-GB" b="1" dirty="0"/>
-              <a:t>Manually Checking : </a:t>
-            </a:r>
-            <a:r>
-              <a:rPr lang="en-GB" dirty="0"/>
-              <a:t>Tried to do all calculation using paper and calculator for verifying accurate results.</a:t>
-            </a:r>
-            <a:r>
-              <a:rPr lang="en-US" dirty="0"/>
-              <a:t>​</a:t>
-            </a:r>
-          </a:p>
-          <a:p>
-            <a:pPr fontAlgn="base"/>
-            <a:r>
-              <a:rPr lang="en-GB" dirty="0"/>
-              <a:t>​</a:t>
-            </a:r>
-          </a:p>
-          <a:p>
-            <a:endParaRPr lang="en-GB" dirty="0"/>
-          </a:p>
-        </p:txBody>
-      </p:sp>
-      <p:sp>
-        <p:nvSpPr>
-          <p:cNvPr id="4" name="Text Placeholder 3">
-            <a:extLst>
-              <a:ext uri="{FF2B5EF4-FFF2-40B4-BE49-F238E27FC236}">
-                <a16:creationId xmlns:a16="http://schemas.microsoft.com/office/drawing/2014/main" id="{A272DE38-2377-A8AB-F82F-46789652E3F9}"/>
-              </a:ext>
-            </a:extLst>
-          </p:cNvPr>
-          <p:cNvSpPr>
-            <a:spLocks noGrp="1"/>
-          </p:cNvSpPr>
-          <p:nvPr>
-            <p:ph type="body" sz="half" idx="2"/>
-          </p:nvPr>
-        </p:nvSpPr>
-        <p:spPr/>
-        <p:txBody>
-          <a:bodyPr/>
-          <a:lstStyle/>
-          <a:p>
-            <a:r>
-              <a:rPr lang="en-GB" dirty="0"/>
-              <a:t>EVIDENCE </a:t>
-            </a:r>
-          </a:p>
-        </p:txBody>
-      </p:sp>
-    </p:spTree>
-    <p:extLst>
-      <p:ext uri="{BB962C8B-B14F-4D97-AF65-F5344CB8AC3E}">
-        <p14:creationId xmlns:p14="http://schemas.microsoft.com/office/powerpoint/2010/main" val="753304717"/>
-      </p:ext>
-    </p:extLst>
-  </p:cSld>
-  <p:clrMapOvr>
-    <a:masterClrMapping/>
-  </p:clrMapOvr>
-</p:sld>
-</file>
-
 <file path=ppt/tags/tag1.xml><?xml version="1.0" encoding="utf-8"?>
 <p:tagLst xmlns:a="http://schemas.openxmlformats.org/drawingml/2006/main" xmlns:r="http://schemas.openxmlformats.org/officeDocument/2006/relationships" xmlns:p="http://schemas.openxmlformats.org/presentationml/2006/main">
-  <p:tag name="PRESGUID" val="a4a6061c-227c-40e1-96f4-b256dbd10140"/>
+  <p:tag name="PRESGUID" val="3a4c30fb-05a4-4fab-9845-f625fabf847e"/>
 </p:tagLst>
 </file>
 
